--- a/public/fun/cards/office/office-12.pptx
+++ b/public/fun/cards/office/office-12.pptx
@@ -3085,7 +3085,7 @@
     <p:bg>
       <p:bgPr>
         <a:solidFill>
-          <a:srgbClr val="F6F8F2"/>
+          <a:srgbClr val="FFFFFF"/>
         </a:solidFill>
         <a:effectLst/>
       </p:bgPr>
@@ -3099,14 +3099,594 @@
       <p:grpSpPr/>
       <p:sp>
         <p:nvSpPr>
-          <p:cNvPr id="2" name="텍스트"/>
+          <p:cNvPr id="2" name="Oval 1"/>
+          <p:cNvSpPr/>
+          <p:nvPr/>
+        </p:nvSpPr>
+        <p:spPr>
+          <a:xfrm>
+            <a:off x="2646000" y="234000"/>
+            <a:ext cx="36000" cy="36000"/>
+          </a:xfrm>
+          <a:prstGeom prst="ellipse">
+            <a:avLst/>
+          </a:prstGeom>
+          <a:solidFill>
+            <a:srgbClr val="FFE600"/>
+          </a:solidFill>
+          <a:ln>
+            <a:noFill/>
+          </a:ln>
+        </p:spPr>
+        <p:txBody>
+          <a:bodyPr rtlCol="0" anchor="ctr"/>
+          <a:lstStyle/>
+          <a:p>
+            <a:pPr algn="ctr"/>
+          </a:p>
+        </p:txBody>
+      </p:sp>
+      <p:sp>
+        <p:nvSpPr>
+          <p:cNvPr id="3" name="Oval 2"/>
+          <p:cNvSpPr/>
+          <p:nvPr/>
+        </p:nvSpPr>
+        <p:spPr>
+          <a:xfrm>
+            <a:off x="2646000" y="334800"/>
+            <a:ext cx="36000" cy="36000"/>
+          </a:xfrm>
+          <a:prstGeom prst="ellipse">
+            <a:avLst/>
+          </a:prstGeom>
+          <a:solidFill>
+            <a:srgbClr val="FFFCDB"/>
+          </a:solidFill>
+          <a:ln>
+            <a:noFill/>
+          </a:ln>
+        </p:spPr>
+        <p:txBody>
+          <a:bodyPr rtlCol="0" anchor="ctr"/>
+          <a:lstStyle/>
+          <a:p>
+            <a:pPr algn="ctr"/>
+          </a:p>
+        </p:txBody>
+      </p:sp>
+      <p:sp>
+        <p:nvSpPr>
+          <p:cNvPr id="4" name="Oval 3"/>
+          <p:cNvSpPr/>
+          <p:nvPr/>
+        </p:nvSpPr>
+        <p:spPr>
+          <a:xfrm>
+            <a:off x="2646000" y="435600"/>
+            <a:ext cx="36000" cy="36000"/>
+          </a:xfrm>
+          <a:prstGeom prst="ellipse">
+            <a:avLst/>
+          </a:prstGeom>
+          <a:solidFill>
+            <a:srgbClr val="FFFCDB"/>
+          </a:solidFill>
+          <a:ln>
+            <a:noFill/>
+          </a:ln>
+        </p:spPr>
+        <p:txBody>
+          <a:bodyPr rtlCol="0" anchor="ctr"/>
+          <a:lstStyle/>
+          <a:p>
+            <a:pPr algn="ctr"/>
+          </a:p>
+        </p:txBody>
+      </p:sp>
+      <p:sp>
+        <p:nvSpPr>
+          <p:cNvPr id="5" name="Oval 4"/>
+          <p:cNvSpPr/>
+          <p:nvPr/>
+        </p:nvSpPr>
+        <p:spPr>
+          <a:xfrm>
+            <a:off x="2646000" y="536400"/>
+            <a:ext cx="36000" cy="36000"/>
+          </a:xfrm>
+          <a:prstGeom prst="ellipse">
+            <a:avLst/>
+          </a:prstGeom>
+          <a:solidFill>
+            <a:srgbClr val="FFE600"/>
+          </a:solidFill>
+          <a:ln>
+            <a:noFill/>
+          </a:ln>
+        </p:spPr>
+        <p:txBody>
+          <a:bodyPr rtlCol="0" anchor="ctr"/>
+          <a:lstStyle/>
+          <a:p>
+            <a:pPr algn="ctr"/>
+          </a:p>
+        </p:txBody>
+      </p:sp>
+      <p:sp>
+        <p:nvSpPr>
+          <p:cNvPr id="6" name="Oval 5"/>
+          <p:cNvSpPr/>
+          <p:nvPr/>
+        </p:nvSpPr>
+        <p:spPr>
+          <a:xfrm>
+            <a:off x="2746800" y="234000"/>
+            <a:ext cx="36000" cy="36000"/>
+          </a:xfrm>
+          <a:prstGeom prst="ellipse">
+            <a:avLst/>
+          </a:prstGeom>
+          <a:solidFill>
+            <a:srgbClr val="FFFCDB"/>
+          </a:solidFill>
+          <a:ln>
+            <a:noFill/>
+          </a:ln>
+        </p:spPr>
+        <p:txBody>
+          <a:bodyPr rtlCol="0" anchor="ctr"/>
+          <a:lstStyle/>
+          <a:p>
+            <a:pPr algn="ctr"/>
+          </a:p>
+        </p:txBody>
+      </p:sp>
+      <p:sp>
+        <p:nvSpPr>
+          <p:cNvPr id="7" name="Oval 6"/>
+          <p:cNvSpPr/>
+          <p:nvPr/>
+        </p:nvSpPr>
+        <p:spPr>
+          <a:xfrm>
+            <a:off x="2746800" y="334800"/>
+            <a:ext cx="36000" cy="36000"/>
+          </a:xfrm>
+          <a:prstGeom prst="ellipse">
+            <a:avLst/>
+          </a:prstGeom>
+          <a:solidFill>
+            <a:srgbClr val="FFFCDB"/>
+          </a:solidFill>
+          <a:ln>
+            <a:noFill/>
+          </a:ln>
+        </p:spPr>
+        <p:txBody>
+          <a:bodyPr rtlCol="0" anchor="ctr"/>
+          <a:lstStyle/>
+          <a:p>
+            <a:pPr algn="ctr"/>
+          </a:p>
+        </p:txBody>
+      </p:sp>
+      <p:sp>
+        <p:nvSpPr>
+          <p:cNvPr id="8" name="Oval 7"/>
+          <p:cNvSpPr/>
+          <p:nvPr/>
+        </p:nvSpPr>
+        <p:spPr>
+          <a:xfrm>
+            <a:off x="2746800" y="435600"/>
+            <a:ext cx="36000" cy="36000"/>
+          </a:xfrm>
+          <a:prstGeom prst="ellipse">
+            <a:avLst/>
+          </a:prstGeom>
+          <a:solidFill>
+            <a:srgbClr val="FFE600"/>
+          </a:solidFill>
+          <a:ln>
+            <a:noFill/>
+          </a:ln>
+        </p:spPr>
+        <p:txBody>
+          <a:bodyPr rtlCol="0" anchor="ctr"/>
+          <a:lstStyle/>
+          <a:p>
+            <a:pPr algn="ctr"/>
+          </a:p>
+        </p:txBody>
+      </p:sp>
+      <p:sp>
+        <p:nvSpPr>
+          <p:cNvPr id="9" name="Oval 8"/>
+          <p:cNvSpPr/>
+          <p:nvPr/>
+        </p:nvSpPr>
+        <p:spPr>
+          <a:xfrm>
+            <a:off x="2746800" y="536400"/>
+            <a:ext cx="36000" cy="36000"/>
+          </a:xfrm>
+          <a:prstGeom prst="ellipse">
+            <a:avLst/>
+          </a:prstGeom>
+          <a:solidFill>
+            <a:srgbClr val="FFFCDB"/>
+          </a:solidFill>
+          <a:ln>
+            <a:noFill/>
+          </a:ln>
+        </p:spPr>
+        <p:txBody>
+          <a:bodyPr rtlCol="0" anchor="ctr"/>
+          <a:lstStyle/>
+          <a:p>
+            <a:pPr algn="ctr"/>
+          </a:p>
+        </p:txBody>
+      </p:sp>
+      <p:sp>
+        <p:nvSpPr>
+          <p:cNvPr id="10" name="Oval 9"/>
+          <p:cNvSpPr/>
+          <p:nvPr/>
+        </p:nvSpPr>
+        <p:spPr>
+          <a:xfrm>
+            <a:off x="2847600" y="234000"/>
+            <a:ext cx="36000" cy="36000"/>
+          </a:xfrm>
+          <a:prstGeom prst="ellipse">
+            <a:avLst/>
+          </a:prstGeom>
+          <a:solidFill>
+            <a:srgbClr val="FFFCDB"/>
+          </a:solidFill>
+          <a:ln>
+            <a:noFill/>
+          </a:ln>
+        </p:spPr>
+        <p:txBody>
+          <a:bodyPr rtlCol="0" anchor="ctr"/>
+          <a:lstStyle/>
+          <a:p>
+            <a:pPr algn="ctr"/>
+          </a:p>
+        </p:txBody>
+      </p:sp>
+      <p:sp>
+        <p:nvSpPr>
+          <p:cNvPr id="11" name="Oval 10"/>
+          <p:cNvSpPr/>
+          <p:nvPr/>
+        </p:nvSpPr>
+        <p:spPr>
+          <a:xfrm>
+            <a:off x="2847600" y="334800"/>
+            <a:ext cx="36000" cy="36000"/>
+          </a:xfrm>
+          <a:prstGeom prst="ellipse">
+            <a:avLst/>
+          </a:prstGeom>
+          <a:solidFill>
+            <a:srgbClr val="FFE600"/>
+          </a:solidFill>
+          <a:ln>
+            <a:noFill/>
+          </a:ln>
+        </p:spPr>
+        <p:txBody>
+          <a:bodyPr rtlCol="0" anchor="ctr"/>
+          <a:lstStyle/>
+          <a:p>
+            <a:pPr algn="ctr"/>
+          </a:p>
+        </p:txBody>
+      </p:sp>
+      <p:sp>
+        <p:nvSpPr>
+          <p:cNvPr id="12" name="Oval 11"/>
+          <p:cNvSpPr/>
+          <p:nvPr/>
+        </p:nvSpPr>
+        <p:spPr>
+          <a:xfrm>
+            <a:off x="2847600" y="435600"/>
+            <a:ext cx="36000" cy="36000"/>
+          </a:xfrm>
+          <a:prstGeom prst="ellipse">
+            <a:avLst/>
+          </a:prstGeom>
+          <a:solidFill>
+            <a:srgbClr val="FFFCDB"/>
+          </a:solidFill>
+          <a:ln>
+            <a:noFill/>
+          </a:ln>
+        </p:spPr>
+        <p:txBody>
+          <a:bodyPr rtlCol="0" anchor="ctr"/>
+          <a:lstStyle/>
+          <a:p>
+            <a:pPr algn="ctr"/>
+          </a:p>
+        </p:txBody>
+      </p:sp>
+      <p:sp>
+        <p:nvSpPr>
+          <p:cNvPr id="13" name="Oval 12"/>
+          <p:cNvSpPr/>
+          <p:nvPr/>
+        </p:nvSpPr>
+        <p:spPr>
+          <a:xfrm>
+            <a:off x="2847600" y="536400"/>
+            <a:ext cx="36000" cy="36000"/>
+          </a:xfrm>
+          <a:prstGeom prst="ellipse">
+            <a:avLst/>
+          </a:prstGeom>
+          <a:solidFill>
+            <a:srgbClr val="FFFCDB"/>
+          </a:solidFill>
+          <a:ln>
+            <a:noFill/>
+          </a:ln>
+        </p:spPr>
+        <p:txBody>
+          <a:bodyPr rtlCol="0" anchor="ctr"/>
+          <a:lstStyle/>
+          <a:p>
+            <a:pPr algn="ctr"/>
+          </a:p>
+        </p:txBody>
+      </p:sp>
+      <p:sp>
+        <p:nvSpPr>
+          <p:cNvPr id="14" name="Oval 13"/>
+          <p:cNvSpPr/>
+          <p:nvPr/>
+        </p:nvSpPr>
+        <p:spPr>
+          <a:xfrm>
+            <a:off x="2948400" y="234000"/>
+            <a:ext cx="36000" cy="36000"/>
+          </a:xfrm>
+          <a:prstGeom prst="ellipse">
+            <a:avLst/>
+          </a:prstGeom>
+          <a:solidFill>
+            <a:srgbClr val="FFE600"/>
+          </a:solidFill>
+          <a:ln>
+            <a:noFill/>
+          </a:ln>
+        </p:spPr>
+        <p:txBody>
+          <a:bodyPr rtlCol="0" anchor="ctr"/>
+          <a:lstStyle/>
+          <a:p>
+            <a:pPr algn="ctr"/>
+          </a:p>
+        </p:txBody>
+      </p:sp>
+      <p:sp>
+        <p:nvSpPr>
+          <p:cNvPr id="15" name="Oval 14"/>
+          <p:cNvSpPr/>
+          <p:nvPr/>
+        </p:nvSpPr>
+        <p:spPr>
+          <a:xfrm>
+            <a:off x="2948400" y="334800"/>
+            <a:ext cx="36000" cy="36000"/>
+          </a:xfrm>
+          <a:prstGeom prst="ellipse">
+            <a:avLst/>
+          </a:prstGeom>
+          <a:solidFill>
+            <a:srgbClr val="FFFCDB"/>
+          </a:solidFill>
+          <a:ln>
+            <a:noFill/>
+          </a:ln>
+        </p:spPr>
+        <p:txBody>
+          <a:bodyPr rtlCol="0" anchor="ctr"/>
+          <a:lstStyle/>
+          <a:p>
+            <a:pPr algn="ctr"/>
+          </a:p>
+        </p:txBody>
+      </p:sp>
+      <p:sp>
+        <p:nvSpPr>
+          <p:cNvPr id="16" name="Oval 15"/>
+          <p:cNvSpPr/>
+          <p:nvPr/>
+        </p:nvSpPr>
+        <p:spPr>
+          <a:xfrm>
+            <a:off x="2948400" y="435600"/>
+            <a:ext cx="36000" cy="36000"/>
+          </a:xfrm>
+          <a:prstGeom prst="ellipse">
+            <a:avLst/>
+          </a:prstGeom>
+          <a:solidFill>
+            <a:srgbClr val="FFFCDB"/>
+          </a:solidFill>
+          <a:ln>
+            <a:noFill/>
+          </a:ln>
+        </p:spPr>
+        <p:txBody>
+          <a:bodyPr rtlCol="0" anchor="ctr"/>
+          <a:lstStyle/>
+          <a:p>
+            <a:pPr algn="ctr"/>
+          </a:p>
+        </p:txBody>
+      </p:sp>
+      <p:sp>
+        <p:nvSpPr>
+          <p:cNvPr id="17" name="Oval 16"/>
+          <p:cNvSpPr/>
+          <p:nvPr/>
+        </p:nvSpPr>
+        <p:spPr>
+          <a:xfrm>
+            <a:off x="2948400" y="536400"/>
+            <a:ext cx="36000" cy="36000"/>
+          </a:xfrm>
+          <a:prstGeom prst="ellipse">
+            <a:avLst/>
+          </a:prstGeom>
+          <a:solidFill>
+            <a:srgbClr val="FFE600"/>
+          </a:solidFill>
+          <a:ln>
+            <a:noFill/>
+          </a:ln>
+        </p:spPr>
+        <p:txBody>
+          <a:bodyPr rtlCol="0" anchor="ctr"/>
+          <a:lstStyle/>
+          <a:p>
+            <a:pPr algn="ctr"/>
+          </a:p>
+        </p:txBody>
+      </p:sp>
+      <p:sp>
+        <p:nvSpPr>
+          <p:cNvPr id="18" name="Oval 17"/>
+          <p:cNvSpPr/>
+          <p:nvPr/>
+        </p:nvSpPr>
+        <p:spPr>
+          <a:xfrm>
+            <a:off x="3049200" y="234000"/>
+            <a:ext cx="36000" cy="36000"/>
+          </a:xfrm>
+          <a:prstGeom prst="ellipse">
+            <a:avLst/>
+          </a:prstGeom>
+          <a:solidFill>
+            <a:srgbClr val="FFFCDB"/>
+          </a:solidFill>
+          <a:ln>
+            <a:noFill/>
+          </a:ln>
+        </p:spPr>
+        <p:txBody>
+          <a:bodyPr rtlCol="0" anchor="ctr"/>
+          <a:lstStyle/>
+          <a:p>
+            <a:pPr algn="ctr"/>
+          </a:p>
+        </p:txBody>
+      </p:sp>
+      <p:sp>
+        <p:nvSpPr>
+          <p:cNvPr id="19" name="Oval 18"/>
+          <p:cNvSpPr/>
+          <p:nvPr/>
+        </p:nvSpPr>
+        <p:spPr>
+          <a:xfrm>
+            <a:off x="3049200" y="334800"/>
+            <a:ext cx="36000" cy="36000"/>
+          </a:xfrm>
+          <a:prstGeom prst="ellipse">
+            <a:avLst/>
+          </a:prstGeom>
+          <a:solidFill>
+            <a:srgbClr val="FFFCDB"/>
+          </a:solidFill>
+          <a:ln>
+            <a:noFill/>
+          </a:ln>
+        </p:spPr>
+        <p:txBody>
+          <a:bodyPr rtlCol="0" anchor="ctr"/>
+          <a:lstStyle/>
+          <a:p>
+            <a:pPr algn="ctr"/>
+          </a:p>
+        </p:txBody>
+      </p:sp>
+      <p:sp>
+        <p:nvSpPr>
+          <p:cNvPr id="20" name="Oval 19"/>
+          <p:cNvSpPr/>
+          <p:nvPr/>
+        </p:nvSpPr>
+        <p:spPr>
+          <a:xfrm>
+            <a:off x="3049200" y="435600"/>
+            <a:ext cx="36000" cy="36000"/>
+          </a:xfrm>
+          <a:prstGeom prst="ellipse">
+            <a:avLst/>
+          </a:prstGeom>
+          <a:solidFill>
+            <a:srgbClr val="FFE600"/>
+          </a:solidFill>
+          <a:ln>
+            <a:noFill/>
+          </a:ln>
+        </p:spPr>
+        <p:txBody>
+          <a:bodyPr rtlCol="0" anchor="ctr"/>
+          <a:lstStyle/>
+          <a:p>
+            <a:pPr algn="ctr"/>
+          </a:p>
+        </p:txBody>
+      </p:sp>
+      <p:sp>
+        <p:nvSpPr>
+          <p:cNvPr id="21" name="Oval 20"/>
+          <p:cNvSpPr/>
+          <p:nvPr/>
+        </p:nvSpPr>
+        <p:spPr>
+          <a:xfrm>
+            <a:off x="3049200" y="536400"/>
+            <a:ext cx="36000" cy="36000"/>
+          </a:xfrm>
+          <a:prstGeom prst="ellipse">
+            <a:avLst/>
+          </a:prstGeom>
+          <a:solidFill>
+            <a:srgbClr val="FFFCDB"/>
+          </a:solidFill>
+          <a:ln>
+            <a:noFill/>
+          </a:ln>
+        </p:spPr>
+        <p:txBody>
+          <a:bodyPr rtlCol="0" anchor="ctr"/>
+          <a:lstStyle/>
+          <a:p>
+            <a:pPr algn="ctr"/>
+          </a:p>
+        </p:txBody>
+      </p:sp>
+      <p:sp>
+        <p:nvSpPr>
+          <p:cNvPr id="22" name="텍스트"/>
           <p:cNvSpPr txBox="1"/>
           <p:nvPr/>
         </p:nvSpPr>
         <p:spPr>
           <a:xfrm>
-            <a:off x="360000" y="201600"/>
-            <a:ext cx="2520000" cy="100800"/>
+            <a:off x="252000" y="223200"/>
+            <a:ext cx="1440000" cy="133351"/>
           </a:xfrm>
           <a:prstGeom prst="rect">
             <a:avLst/>
@@ -3119,15 +3699,15 @@
           </a:bodyPr>
           <a:lstStyle/>
           <a:p>
-            <a:pPr algn="ctr">
+            <a:pPr algn="l">
               <a:lnSpc>
                 <a:spcPts val="1015"/>
               </a:lnSpc>
             </a:pPr>
             <a:r>
-              <a:rPr sz="700" b="1" spc="300">
+              <a:rPr sz="700" b="1" spc="200">
                 <a:solidFill>
-                  <a:srgbClr val="6B725C"/>
+                  <a:srgbClr val="6B7280"/>
                 </a:solidFill>
                 <a:latin typeface="맑은 고딕"/>
                 <a:ea typeface="맑은 고딕"/>
@@ -3139,128 +3719,14 @@
       </p:sp>
       <p:sp>
         <p:nvSpPr>
-          <p:cNvPr id="3" name="Rounded Rectangle 2"/>
-          <p:cNvSpPr/>
-          <p:nvPr/>
-        </p:nvSpPr>
-        <p:spPr>
-          <a:xfrm>
-            <a:off x="1542240" y="516960"/>
-            <a:ext cx="43200" cy="77760"/>
-          </a:xfrm>
-          <a:prstGeom prst="roundRect">
-            <a:avLst>
-              <a:gd name="adj" fmla="val 10000"/>
-            </a:avLst>
-          </a:prstGeom>
-          <a:solidFill>
-            <a:srgbClr val="819852"/>
-          </a:solidFill>
-          <a:ln>
-            <a:noFill/>
-          </a:ln>
-        </p:spPr>
-        <p:txBody>
-          <a:bodyPr rtlCol="0" anchor="ctr"/>
-          <a:lstStyle/>
-          <a:p>
-            <a:pPr algn="ctr"/>
-          </a:p>
-        </p:txBody>
-      </p:sp>
-      <p:sp>
-        <p:nvSpPr>
-          <p:cNvPr id="4" name="Rounded Rectangle 3"/>
-          <p:cNvSpPr/>
-          <p:nvPr/>
-        </p:nvSpPr>
-        <p:spPr>
-          <a:xfrm>
-            <a:off x="1598400" y="473760"/>
-            <a:ext cx="43200" cy="120960"/>
-          </a:xfrm>
-          <a:prstGeom prst="roundRect">
-            <a:avLst>
-              <a:gd name="adj" fmla="val 10000"/>
-            </a:avLst>
-          </a:prstGeom>
-          <a:solidFill>
-            <a:srgbClr val="ECF1E2"/>
-          </a:solidFill>
-          <a:ln>
-            <a:noFill/>
-          </a:ln>
-        </p:spPr>
-        <p:txBody>
-          <a:bodyPr rtlCol="0" anchor="ctr"/>
-          <a:lstStyle/>
-          <a:p>
-            <a:pPr algn="ctr"/>
-          </a:p>
-        </p:txBody>
-      </p:sp>
-      <p:sp>
-        <p:nvSpPr>
-          <p:cNvPr id="5" name="Rounded Rectangle 4"/>
-          <p:cNvSpPr/>
-          <p:nvPr/>
-        </p:nvSpPr>
-        <p:spPr>
-          <a:xfrm>
-            <a:off x="1654560" y="421920"/>
-            <a:ext cx="43200" cy="172800"/>
-          </a:xfrm>
-          <a:prstGeom prst="roundRect">
-            <a:avLst>
-              <a:gd name="adj" fmla="val 10000"/>
-            </a:avLst>
-          </a:prstGeom>
-          <a:solidFill>
-            <a:srgbClr val="819852"/>
-          </a:solidFill>
-          <a:ln>
-            <a:noFill/>
-          </a:ln>
-        </p:spPr>
-        <p:txBody>
-          <a:bodyPr rtlCol="0" anchor="ctr"/>
-          <a:lstStyle/>
-          <a:p>
-            <a:pPr algn="ctr"/>
-          </a:p>
-        </p:txBody>
-      </p:sp>
-      <p:cxnSp>
-        <p:nvCxnSpPr>
-          <p:cNvPr id="6" name="Connector 5"/>
-          <p:cNvCxnSpPr/>
-          <p:nvPr/>
-        </p:nvCxnSpPr>
-        <p:spPr>
-          <a:xfrm>
-            <a:off x="1524960" y="603360"/>
-            <a:ext cx="190080" cy="0"/>
-          </a:xfrm>
-          <a:prstGeom prst="line">
-            <a:avLst/>
-          </a:prstGeom>
-          <a:ln w="8640">
-            <a:solidFill>
-              <a:srgbClr val="ECF1E2"/>
-            </a:solidFill>
-          </a:ln>
-        </p:spPr>
-      </p:cxnSp>
-      <p:sp>
-        <p:nvSpPr>
-          <p:cNvPr id="7" name="텍스트"/>
+          <p:cNvPr id="23" name="텍스트"/>
           <p:cNvSpPr txBox="1"/>
           <p:nvPr/>
         </p:nvSpPr>
         <p:spPr>
           <a:xfrm>
-            <a:off x="360000" y="684000"/>
-            <a:ext cx="2520000" cy="313692"/>
+            <a:off x="252000" y="770400"/>
+            <a:ext cx="2016000" cy="360000"/>
           </a:xfrm>
           <a:prstGeom prst="rect">
             <a:avLst/>
@@ -3273,18 +3739,18 @@
           </a:bodyPr>
           <a:lstStyle/>
           <a:p>
-            <a:pPr algn="ctr">
+            <a:pPr algn="l">
               <a:lnSpc>
-                <a:spcPts val="2755"/>
+                <a:spcPts val="3190"/>
               </a:lnSpc>
             </a:pPr>
             <a:r>
-              <a:rPr sz="1900" b="1" spc="50">
+              <a:rPr sz="2200" b="1">
                 <a:solidFill>
-                  <a:srgbClr val="49562E"/>
+                  <a:srgbClr val="12151C"/>
                 </a:solidFill>
-                <a:latin typeface="바탕"/>
-                <a:ea typeface="바탕"/>
+                <a:latin typeface="맑은 고딕"/>
+                <a:ea typeface="맑은 고딕"/>
               </a:rPr>
               <a:t>오지호</a:t>
             </a:r>
@@ -3293,14 +3759,14 @@
       </p:sp>
       <p:sp>
         <p:nvSpPr>
-          <p:cNvPr id="8" name="텍스트"/>
+          <p:cNvPr id="24" name="텍스트"/>
           <p:cNvSpPr txBox="1"/>
           <p:nvPr/>
         </p:nvSpPr>
         <p:spPr>
           <a:xfrm>
-            <a:off x="360000" y="1051200"/>
-            <a:ext cx="2520000" cy="122400"/>
+            <a:off x="252000" y="1173600"/>
+            <a:ext cx="2016000" cy="171451"/>
           </a:xfrm>
           <a:prstGeom prst="rect">
             <a:avLst/>
@@ -3313,15 +3779,15 @@
           </a:bodyPr>
           <a:lstStyle/>
           <a:p>
-            <a:pPr algn="ctr">
+            <a:pPr algn="l">
               <a:lnSpc>
-                <a:spcPts val="1232"/>
+                <a:spcPts val="1305"/>
               </a:lnSpc>
             </a:pPr>
             <a:r>
-              <a:rPr sz="850" b="1">
+              <a:rPr sz="900" b="0">
                 <a:solidFill>
-                  <a:srgbClr val="61723E"/>
+                  <a:srgbClr val="6B7280"/>
                 </a:solidFill>
                 <a:latin typeface="맑은 고딕"/>
                 <a:ea typeface="맑은 고딕"/>
@@ -3333,43 +3799,14 @@
       </p:sp>
       <p:sp>
         <p:nvSpPr>
-          <p:cNvPr id="9" name="Rectangle 8"/>
-          <p:cNvSpPr/>
-          <p:nvPr/>
-        </p:nvSpPr>
-        <p:spPr>
-          <a:xfrm>
-            <a:off x="1512000" y="1245600"/>
-            <a:ext cx="216000" cy="10800"/>
-          </a:xfrm>
-          <a:prstGeom prst="rect">
-            <a:avLst/>
-          </a:prstGeom>
-          <a:solidFill>
-            <a:srgbClr val="819852"/>
-          </a:solidFill>
-          <a:ln>
-            <a:noFill/>
-          </a:ln>
-        </p:spPr>
-        <p:txBody>
-          <a:bodyPr rtlCol="0" anchor="ctr"/>
-          <a:lstStyle/>
-          <a:p>
-            <a:pPr algn="ctr"/>
-          </a:p>
-        </p:txBody>
-      </p:sp>
-      <p:sp>
-        <p:nvSpPr>
-          <p:cNvPr id="10" name="텍스트"/>
+          <p:cNvPr id="25" name="텍스트"/>
           <p:cNvSpPr txBox="1"/>
           <p:nvPr/>
         </p:nvSpPr>
         <p:spPr>
           <a:xfrm>
-            <a:off x="360000" y="1339200"/>
-            <a:ext cx="2520000" cy="108000"/>
+            <a:off x="1620000" y="1339200"/>
+            <a:ext cx="1368000" cy="133351"/>
           </a:xfrm>
           <a:prstGeom prst="rect">
             <a:avLst/>
@@ -3382,7 +3819,7 @@
           </a:bodyPr>
           <a:lstStyle/>
           <a:p>
-            <a:pPr algn="ctr">
+            <a:pPr algn="r">
               <a:lnSpc>
                 <a:spcPts val="1015"/>
               </a:lnSpc>
@@ -3390,26 +3827,26 @@
             <a:r>
               <a:rPr sz="700" b="0">
                 <a:solidFill>
-                  <a:srgbClr val="49562E"/>
+                  <a:srgbClr val="12151C"/>
                 </a:solidFill>
                 <a:latin typeface="맑은 고딕"/>
                 <a:ea typeface="맑은 고딕"/>
               </a:rPr>
-              <a:t>010-1234-5678   ·   name@example.com</a:t>
-            </a:r>
-          </a:p>
-        </p:txBody>
-      </p:sp>
-      <p:sp>
-        <p:nvSpPr>
-          <p:cNvPr id="11" name="텍스트"/>
+              <a:t>010-1234-5678</a:t>
+            </a:r>
+          </a:p>
+        </p:txBody>
+      </p:sp>
+      <p:sp>
+        <p:nvSpPr>
+          <p:cNvPr id="26" name="텍스트"/>
           <p:cNvSpPr txBox="1"/>
           <p:nvPr/>
         </p:nvSpPr>
         <p:spPr>
           <a:xfrm>
-            <a:off x="360000" y="1468800"/>
-            <a:ext cx="2520000" cy="108000"/>
+            <a:off x="1620000" y="1476000"/>
+            <a:ext cx="1368000" cy="133351"/>
           </a:xfrm>
           <a:prstGeom prst="rect">
             <a:avLst/>
@@ -3422,7 +3859,7 @@
           </a:bodyPr>
           <a:lstStyle/>
           <a:p>
-            <a:pPr algn="ctr">
+            <a:pPr algn="r">
               <a:lnSpc>
                 <a:spcPts val="1015"/>
               </a:lnSpc>
@@ -3430,7 +3867,47 @@
             <a:r>
               <a:rPr sz="700" b="0">
                 <a:solidFill>
-                  <a:srgbClr val="6B725C"/>
+                  <a:srgbClr val="12151C"/>
+                </a:solidFill>
+                <a:latin typeface="맑은 고딕"/>
+                <a:ea typeface="맑은 고딕"/>
+              </a:rPr>
+              <a:t>name@example.com</a:t>
+            </a:r>
+          </a:p>
+        </p:txBody>
+      </p:sp>
+      <p:sp>
+        <p:nvSpPr>
+          <p:cNvPr id="27" name="텍스트"/>
+          <p:cNvSpPr txBox="1"/>
+          <p:nvPr/>
+        </p:nvSpPr>
+        <p:spPr>
+          <a:xfrm>
+            <a:off x="1620000" y="1612800"/>
+            <a:ext cx="1368000" cy="133351"/>
+          </a:xfrm>
+          <a:prstGeom prst="rect">
+            <a:avLst/>
+          </a:prstGeom>
+          <a:noFill/>
+        </p:spPr>
+        <p:txBody>
+          <a:bodyPr wrap="square" lIns="0" rIns="0" tIns="0" bIns="0" anchor="t">
+            <a:spAutoFit/>
+          </a:bodyPr>
+          <a:lstStyle/>
+          <a:p>
+            <a:pPr algn="r">
+              <a:lnSpc>
+                <a:spcPts val="1015"/>
+              </a:lnSpc>
+            </a:pPr>
+            <a:r>
+              <a:rPr sz="700" b="0">
+                <a:solidFill>
+                  <a:srgbClr val="12151C"/>
                 </a:solidFill>
                 <a:latin typeface="맑은 고딕"/>
                 <a:ea typeface="맑은 고딕"/>
@@ -3454,7 +3931,7 @@
     <p:bg>
       <p:bgPr>
         <a:solidFill>
-          <a:srgbClr val="FBF8F2"/>
+          <a:srgbClr val="F3F4F6"/>
         </a:solidFill>
         <a:effectLst/>
       </p:bgPr>
@@ -3466,413 +3943,22 @@
         <p:nvPr/>
       </p:nvGrpSpPr>
       <p:grpSpPr/>
-      <p:cxnSp>
-        <p:nvCxnSpPr>
-          <p:cNvPr id="2" name="Connector 1"/>
-          <p:cNvCxnSpPr/>
-          <p:nvPr/>
-        </p:nvCxnSpPr>
-        <p:spPr>
-          <a:xfrm>
-            <a:off x="0" y="93600"/>
-            <a:ext cx="3240000" cy="0"/>
-          </a:xfrm>
-          <a:prstGeom prst="line">
-            <a:avLst/>
-          </a:prstGeom>
-          <a:ln w="7200">
-            <a:solidFill>
-              <a:srgbClr val="475285">
-                <a:alpha val="30000"/>
-              </a:srgbClr>
-            </a:solidFill>
-          </a:ln>
-        </p:spPr>
-      </p:cxnSp>
-      <p:cxnSp>
-        <p:nvCxnSpPr>
-          <p:cNvPr id="3" name="Connector 2"/>
-          <p:cNvCxnSpPr/>
-          <p:nvPr/>
-        </p:nvCxnSpPr>
-        <p:spPr>
-          <a:xfrm>
-            <a:off x="0" y="201600"/>
-            <a:ext cx="3240000" cy="0"/>
-          </a:xfrm>
-          <a:prstGeom prst="line">
-            <a:avLst/>
-          </a:prstGeom>
-          <a:ln w="7200">
-            <a:solidFill>
-              <a:srgbClr val="475285">
-                <a:alpha val="30000"/>
-              </a:srgbClr>
-            </a:solidFill>
-          </a:ln>
-        </p:spPr>
-      </p:cxnSp>
-      <p:cxnSp>
-        <p:nvCxnSpPr>
-          <p:cNvPr id="4" name="Connector 3"/>
-          <p:cNvCxnSpPr/>
-          <p:nvPr/>
-        </p:nvCxnSpPr>
-        <p:spPr>
-          <a:xfrm>
-            <a:off x="0" y="309600"/>
-            <a:ext cx="3240000" cy="0"/>
-          </a:xfrm>
-          <a:prstGeom prst="line">
-            <a:avLst/>
-          </a:prstGeom>
-          <a:ln w="7200">
-            <a:solidFill>
-              <a:srgbClr val="475285">
-                <a:alpha val="30000"/>
-              </a:srgbClr>
-            </a:solidFill>
-          </a:ln>
-        </p:spPr>
-      </p:cxnSp>
-      <p:cxnSp>
-        <p:nvCxnSpPr>
-          <p:cNvPr id="5" name="Connector 4"/>
-          <p:cNvCxnSpPr/>
-          <p:nvPr/>
-        </p:nvCxnSpPr>
-        <p:spPr>
-          <a:xfrm>
-            <a:off x="0" y="417600"/>
-            <a:ext cx="3240000" cy="0"/>
-          </a:xfrm>
-          <a:prstGeom prst="line">
-            <a:avLst/>
-          </a:prstGeom>
-          <a:ln w="7200">
-            <a:solidFill>
-              <a:srgbClr val="475285">
-                <a:alpha val="30000"/>
-              </a:srgbClr>
-            </a:solidFill>
-          </a:ln>
-        </p:spPr>
-      </p:cxnSp>
-      <p:cxnSp>
-        <p:nvCxnSpPr>
-          <p:cNvPr id="6" name="Connector 5"/>
-          <p:cNvCxnSpPr/>
-          <p:nvPr/>
-        </p:nvCxnSpPr>
-        <p:spPr>
-          <a:xfrm>
-            <a:off x="0" y="525600"/>
-            <a:ext cx="3240000" cy="0"/>
-          </a:xfrm>
-          <a:prstGeom prst="line">
-            <a:avLst/>
-          </a:prstGeom>
-          <a:ln w="7200">
-            <a:solidFill>
-              <a:srgbClr val="475285">
-                <a:alpha val="30000"/>
-              </a:srgbClr>
-            </a:solidFill>
-          </a:ln>
-        </p:spPr>
-      </p:cxnSp>
-      <p:cxnSp>
-        <p:nvCxnSpPr>
-          <p:cNvPr id="7" name="Connector 6"/>
-          <p:cNvCxnSpPr/>
-          <p:nvPr/>
-        </p:nvCxnSpPr>
-        <p:spPr>
-          <a:xfrm>
-            <a:off x="0" y="633600"/>
-            <a:ext cx="3240000" cy="0"/>
-          </a:xfrm>
-          <a:prstGeom prst="line">
-            <a:avLst/>
-          </a:prstGeom>
-          <a:ln w="7200">
-            <a:solidFill>
-              <a:srgbClr val="475285">
-                <a:alpha val="30000"/>
-              </a:srgbClr>
-            </a:solidFill>
-          </a:ln>
-        </p:spPr>
-      </p:cxnSp>
-      <p:cxnSp>
-        <p:nvCxnSpPr>
-          <p:cNvPr id="8" name="Connector 7"/>
-          <p:cNvCxnSpPr/>
-          <p:nvPr/>
-        </p:nvCxnSpPr>
-        <p:spPr>
-          <a:xfrm>
-            <a:off x="0" y="741600"/>
-            <a:ext cx="3240000" cy="0"/>
-          </a:xfrm>
-          <a:prstGeom prst="line">
-            <a:avLst/>
-          </a:prstGeom>
-          <a:ln w="7200">
-            <a:solidFill>
-              <a:srgbClr val="475285">
-                <a:alpha val="30000"/>
-              </a:srgbClr>
-            </a:solidFill>
-          </a:ln>
-        </p:spPr>
-      </p:cxnSp>
-      <p:cxnSp>
-        <p:nvCxnSpPr>
-          <p:cNvPr id="9" name="Connector 8"/>
-          <p:cNvCxnSpPr/>
-          <p:nvPr/>
-        </p:nvCxnSpPr>
-        <p:spPr>
-          <a:xfrm>
-            <a:off x="0" y="849600"/>
-            <a:ext cx="3240000" cy="0"/>
-          </a:xfrm>
-          <a:prstGeom prst="line">
-            <a:avLst/>
-          </a:prstGeom>
-          <a:ln w="7200">
-            <a:solidFill>
-              <a:srgbClr val="475285">
-                <a:alpha val="30000"/>
-              </a:srgbClr>
-            </a:solidFill>
-          </a:ln>
-        </p:spPr>
-      </p:cxnSp>
-      <p:cxnSp>
-        <p:nvCxnSpPr>
-          <p:cNvPr id="10" name="Connector 9"/>
-          <p:cNvCxnSpPr/>
-          <p:nvPr/>
-        </p:nvCxnSpPr>
-        <p:spPr>
-          <a:xfrm>
-            <a:off x="0" y="957600"/>
-            <a:ext cx="3240000" cy="0"/>
-          </a:xfrm>
-          <a:prstGeom prst="line">
-            <a:avLst/>
-          </a:prstGeom>
-          <a:ln w="7200">
-            <a:solidFill>
-              <a:srgbClr val="475285">
-                <a:alpha val="30000"/>
-              </a:srgbClr>
-            </a:solidFill>
-          </a:ln>
-        </p:spPr>
-      </p:cxnSp>
-      <p:cxnSp>
-        <p:nvCxnSpPr>
-          <p:cNvPr id="11" name="Connector 10"/>
-          <p:cNvCxnSpPr/>
-          <p:nvPr/>
-        </p:nvCxnSpPr>
-        <p:spPr>
-          <a:xfrm>
-            <a:off x="0" y="1065600"/>
-            <a:ext cx="3240000" cy="0"/>
-          </a:xfrm>
-          <a:prstGeom prst="line">
-            <a:avLst/>
-          </a:prstGeom>
-          <a:ln w="7200">
-            <a:solidFill>
-              <a:srgbClr val="475285">
-                <a:alpha val="30000"/>
-              </a:srgbClr>
-            </a:solidFill>
-          </a:ln>
-        </p:spPr>
-      </p:cxnSp>
-      <p:cxnSp>
-        <p:nvCxnSpPr>
-          <p:cNvPr id="12" name="Connector 11"/>
-          <p:cNvCxnSpPr/>
-          <p:nvPr/>
-        </p:nvCxnSpPr>
-        <p:spPr>
-          <a:xfrm>
-            <a:off x="0" y="1173600"/>
-            <a:ext cx="3240000" cy="0"/>
-          </a:xfrm>
-          <a:prstGeom prst="line">
-            <a:avLst/>
-          </a:prstGeom>
-          <a:ln w="7200">
-            <a:solidFill>
-              <a:srgbClr val="475285">
-                <a:alpha val="30000"/>
-              </a:srgbClr>
-            </a:solidFill>
-          </a:ln>
-        </p:spPr>
-      </p:cxnSp>
-      <p:cxnSp>
-        <p:nvCxnSpPr>
-          <p:cNvPr id="13" name="Connector 12"/>
-          <p:cNvCxnSpPr/>
-          <p:nvPr/>
-        </p:nvCxnSpPr>
-        <p:spPr>
-          <a:xfrm>
-            <a:off x="0" y="1281600"/>
-            <a:ext cx="3240000" cy="0"/>
-          </a:xfrm>
-          <a:prstGeom prst="line">
-            <a:avLst/>
-          </a:prstGeom>
-          <a:ln w="7200">
-            <a:solidFill>
-              <a:srgbClr val="475285">
-                <a:alpha val="30000"/>
-              </a:srgbClr>
-            </a:solidFill>
-          </a:ln>
-        </p:spPr>
-      </p:cxnSp>
-      <p:cxnSp>
-        <p:nvCxnSpPr>
-          <p:cNvPr id="14" name="Connector 13"/>
-          <p:cNvCxnSpPr/>
-          <p:nvPr/>
-        </p:nvCxnSpPr>
-        <p:spPr>
-          <a:xfrm>
-            <a:off x="0" y="1389600"/>
-            <a:ext cx="3240000" cy="0"/>
-          </a:xfrm>
-          <a:prstGeom prst="line">
-            <a:avLst/>
-          </a:prstGeom>
-          <a:ln w="7200">
-            <a:solidFill>
-              <a:srgbClr val="475285">
-                <a:alpha val="30000"/>
-              </a:srgbClr>
-            </a:solidFill>
-          </a:ln>
-        </p:spPr>
-      </p:cxnSp>
-      <p:cxnSp>
-        <p:nvCxnSpPr>
-          <p:cNvPr id="15" name="Connector 14"/>
-          <p:cNvCxnSpPr/>
-          <p:nvPr/>
-        </p:nvCxnSpPr>
-        <p:spPr>
-          <a:xfrm>
-            <a:off x="0" y="1497600"/>
-            <a:ext cx="3240000" cy="0"/>
-          </a:xfrm>
-          <a:prstGeom prst="line">
-            <a:avLst/>
-          </a:prstGeom>
-          <a:ln w="7200">
-            <a:solidFill>
-              <a:srgbClr val="475285">
-                <a:alpha val="30000"/>
-              </a:srgbClr>
-            </a:solidFill>
-          </a:ln>
-        </p:spPr>
-      </p:cxnSp>
-      <p:cxnSp>
-        <p:nvCxnSpPr>
-          <p:cNvPr id="16" name="Connector 15"/>
-          <p:cNvCxnSpPr/>
-          <p:nvPr/>
-        </p:nvCxnSpPr>
-        <p:spPr>
-          <a:xfrm>
-            <a:off x="0" y="1605600"/>
-            <a:ext cx="3240000" cy="0"/>
-          </a:xfrm>
-          <a:prstGeom prst="line">
-            <a:avLst/>
-          </a:prstGeom>
-          <a:ln w="7200">
-            <a:solidFill>
-              <a:srgbClr val="475285">
-                <a:alpha val="30000"/>
-              </a:srgbClr>
-            </a:solidFill>
-          </a:ln>
-        </p:spPr>
-      </p:cxnSp>
-      <p:cxnSp>
-        <p:nvCxnSpPr>
-          <p:cNvPr id="17" name="Connector 16"/>
-          <p:cNvCxnSpPr/>
-          <p:nvPr/>
-        </p:nvCxnSpPr>
-        <p:spPr>
-          <a:xfrm>
-            <a:off x="0" y="1713600"/>
-            <a:ext cx="3240000" cy="0"/>
-          </a:xfrm>
-          <a:prstGeom prst="line">
-            <a:avLst/>
-          </a:prstGeom>
-          <a:ln w="7200">
-            <a:solidFill>
-              <a:srgbClr val="475285">
-                <a:alpha val="30000"/>
-              </a:srgbClr>
-            </a:solidFill>
-          </a:ln>
-        </p:spPr>
-      </p:cxnSp>
-      <p:cxnSp>
-        <p:nvCxnSpPr>
-          <p:cNvPr id="18" name="Connector 17"/>
-          <p:cNvCxnSpPr/>
-          <p:nvPr/>
-        </p:nvCxnSpPr>
-        <p:spPr>
-          <a:xfrm>
-            <a:off x="0" y="1821600"/>
-            <a:ext cx="3240000" cy="0"/>
-          </a:xfrm>
-          <a:prstGeom prst="line">
-            <a:avLst/>
-          </a:prstGeom>
-          <a:ln w="7200">
-            <a:solidFill>
-              <a:srgbClr val="475285">
-                <a:alpha val="30000"/>
-              </a:srgbClr>
-            </a:solidFill>
-          </a:ln>
-        </p:spPr>
-      </p:cxnSp>
-      <p:sp>
-        <p:nvSpPr>
-          <p:cNvPr id="19" name="Rectangle 18"/>
+      <p:sp>
+        <p:nvSpPr>
+          <p:cNvPr id="2" name="Oval 1"/>
           <p:cNvSpPr/>
           <p:nvPr/>
         </p:nvSpPr>
         <p:spPr>
           <a:xfrm>
-            <a:off x="468000" y="468000"/>
-            <a:ext cx="2304000" cy="864000"/>
-          </a:xfrm>
-          <a:prstGeom prst="rect">
+            <a:off x="1591200" y="511200"/>
+            <a:ext cx="57600" cy="57600"/>
+          </a:xfrm>
+          <a:prstGeom prst="ellipse">
             <a:avLst/>
           </a:prstGeom>
           <a:solidFill>
-            <a:srgbClr val="FBF8F2"/>
+            <a:srgbClr val="FFE600"/>
           </a:solidFill>
           <a:ln>
             <a:noFill/>
@@ -3888,43 +3974,54 @@
       </p:sp>
       <p:sp>
         <p:nvSpPr>
-          <p:cNvPr id="20" name="Rectangle 19"/>
-          <p:cNvSpPr/>
+          <p:cNvPr id="3" name="텍스트"/>
+          <p:cNvSpPr txBox="1"/>
           <p:nvPr/>
         </p:nvSpPr>
         <p:spPr>
           <a:xfrm>
-            <a:off x="468000" y="468000"/>
-            <a:ext cx="2304000" cy="864000"/>
+            <a:off x="396000" y="684000"/>
+            <a:ext cx="2448000" cy="504000"/>
           </a:xfrm>
           <a:prstGeom prst="rect">
             <a:avLst/>
           </a:prstGeom>
           <a:noFill/>
-          <a:ln w="9000">
-            <a:solidFill>
-              <a:srgbClr val="475285"/>
-            </a:solidFill>
-          </a:ln>
-        </p:spPr>
-        <p:txBody>
-          <a:bodyPr rtlCol="0" anchor="ctr"/>
-          <a:lstStyle/>
-          <a:p>
-            <a:pPr algn="ctr"/>
-          </a:p>
-        </p:txBody>
-      </p:sp>
-      <p:sp>
-        <p:nvSpPr>
-          <p:cNvPr id="21" name="텍스트"/>
+        </p:spPr>
+        <p:txBody>
+          <a:bodyPr wrap="square" lIns="0" rIns="0" tIns="0" bIns="0" anchor="t">
+            <a:spAutoFit/>
+          </a:bodyPr>
+          <a:lstStyle/>
+          <a:p>
+            <a:pPr algn="ctr">
+              <a:lnSpc>
+                <a:spcPts val="1739"/>
+              </a:lnSpc>
+            </a:pPr>
+            <a:r>
+              <a:rPr sz="1200" b="1">
+                <a:solidFill>
+                  <a:srgbClr val="12151C"/>
+                </a:solidFill>
+                <a:latin typeface="맑은 고딕"/>
+                <a:ea typeface="맑은 고딕"/>
+              </a:rPr>
+              <a:t>숫자 뒤의 사람을 먼저 봅니다</a:t>
+            </a:r>
+          </a:p>
+        </p:txBody>
+      </p:sp>
+      <p:sp>
+        <p:nvSpPr>
+          <p:cNvPr id="4" name="텍스트"/>
           <p:cNvSpPr txBox="1"/>
           <p:nvPr/>
         </p:nvSpPr>
         <p:spPr>
           <a:xfrm>
-            <a:off x="576000" y="540000"/>
-            <a:ext cx="2088000" cy="720000"/>
+            <a:off x="360000" y="1339200"/>
+            <a:ext cx="2520000" cy="123826"/>
           </a:xfrm>
           <a:prstGeom prst="rect">
             <a:avLst/>
@@ -3932,46 +4029,6 @@
           <a:noFill/>
         </p:spPr>
         <p:txBody>
-          <a:bodyPr wrap="square" lIns="0" rIns="0" tIns="0" bIns="0" anchor="ctr">
-            <a:spAutoFit/>
-          </a:bodyPr>
-          <a:lstStyle/>
-          <a:p>
-            <a:pPr algn="ctr">
-              <a:lnSpc>
-                <a:spcPts val="1667"/>
-              </a:lnSpc>
-            </a:pPr>
-            <a:r>
-              <a:rPr sz="1150" b="1">
-                <a:solidFill>
-                  <a:srgbClr val="49562E"/>
-                </a:solidFill>
-                <a:latin typeface="바탕"/>
-                <a:ea typeface="바탕"/>
-              </a:rPr>
-              <a:t>숫자 뒤의 사람을 먼저 봅니다</a:t>
-            </a:r>
-          </a:p>
-        </p:txBody>
-      </p:sp>
-      <p:sp>
-        <p:nvSpPr>
-          <p:cNvPr id="22" name="텍스트"/>
-          <p:cNvSpPr txBox="1"/>
-          <p:nvPr/>
-        </p:nvSpPr>
-        <p:spPr>
-          <a:xfrm>
-            <a:off x="360000" y="1468800"/>
-            <a:ext cx="2520000" cy="108000"/>
-          </a:xfrm>
-          <a:prstGeom prst="rect">
-            <a:avLst/>
-          </a:prstGeom>
-          <a:noFill/>
-        </p:spPr>
-        <p:txBody>
           <a:bodyPr wrap="square" lIns="0" rIns="0" tIns="0" bIns="0" anchor="t">
             <a:spAutoFit/>
           </a:bodyPr>
@@ -3979,13 +4036,13 @@
           <a:p>
             <a:pPr algn="ctr">
               <a:lnSpc>
-                <a:spcPts val="1015"/>
+                <a:spcPts val="942"/>
               </a:lnSpc>
             </a:pPr>
             <a:r>
-              <a:rPr sz="700" b="1" spc="300">
+              <a:rPr sz="650" b="1" spc="300">
                 <a:solidFill>
-                  <a:srgbClr val="6C725C"/>
+                  <a:srgbClr val="6B7280"/>
                 </a:solidFill>
                 <a:latin typeface="맑은 고딕"/>
                 <a:ea typeface="맑은 고딕"/>

--- a/public/fun/cards/office/office-12.pptx
+++ b/public/fun/cards/office/office-12.pptx
@@ -3099,16 +3099,45 @@
       <p:grpSpPr/>
       <p:sp>
         <p:nvSpPr>
-          <p:cNvPr id="2" name="Oval 1"/>
+          <p:cNvPr id="2" name="Rectangle 1"/>
           <p:cNvSpPr/>
           <p:nvPr/>
         </p:nvSpPr>
         <p:spPr>
           <a:xfrm>
-            <a:off x="2646000" y="234000"/>
-            <a:ext cx="36000" cy="36000"/>
-          </a:xfrm>
-          <a:prstGeom prst="ellipse">
+            <a:off x="0" y="1296000"/>
+            <a:ext cx="3240000" cy="504000"/>
+          </a:xfrm>
+          <a:prstGeom prst="rect">
+            <a:avLst/>
+          </a:prstGeom>
+          <a:solidFill>
+            <a:srgbClr val="FFFCDB"/>
+          </a:solidFill>
+          <a:ln>
+            <a:noFill/>
+          </a:ln>
+        </p:spPr>
+        <p:txBody>
+          <a:bodyPr rtlCol="0" anchor="ctr"/>
+          <a:lstStyle/>
+          <a:p>
+            <a:pPr algn="ctr"/>
+          </a:p>
+        </p:txBody>
+      </p:sp>
+      <p:sp>
+        <p:nvSpPr>
+          <p:cNvPr id="3" name="Rectangle 2"/>
+          <p:cNvSpPr/>
+          <p:nvPr/>
+        </p:nvSpPr>
+        <p:spPr>
+          <a:xfrm>
+            <a:off x="0" y="1296000"/>
+            <a:ext cx="3240000" cy="14400"/>
+          </a:xfrm>
+          <a:prstGeom prst="rect">
             <a:avLst/>
           </a:prstGeom>
           <a:solidFill>
@@ -3128,565 +3157,14 @@
       </p:sp>
       <p:sp>
         <p:nvSpPr>
-          <p:cNvPr id="3" name="Oval 2"/>
-          <p:cNvSpPr/>
-          <p:nvPr/>
-        </p:nvSpPr>
-        <p:spPr>
-          <a:xfrm>
-            <a:off x="2646000" y="334800"/>
-            <a:ext cx="36000" cy="36000"/>
-          </a:xfrm>
-          <a:prstGeom prst="ellipse">
-            <a:avLst/>
-          </a:prstGeom>
-          <a:solidFill>
-            <a:srgbClr val="FFFCDB"/>
-          </a:solidFill>
-          <a:ln>
-            <a:noFill/>
-          </a:ln>
-        </p:spPr>
-        <p:txBody>
-          <a:bodyPr rtlCol="0" anchor="ctr"/>
-          <a:lstStyle/>
-          <a:p>
-            <a:pPr algn="ctr"/>
-          </a:p>
-        </p:txBody>
-      </p:sp>
-      <p:sp>
-        <p:nvSpPr>
-          <p:cNvPr id="4" name="Oval 3"/>
-          <p:cNvSpPr/>
-          <p:nvPr/>
-        </p:nvSpPr>
-        <p:spPr>
-          <a:xfrm>
-            <a:off x="2646000" y="435600"/>
-            <a:ext cx="36000" cy="36000"/>
-          </a:xfrm>
-          <a:prstGeom prst="ellipse">
-            <a:avLst/>
-          </a:prstGeom>
-          <a:solidFill>
-            <a:srgbClr val="FFFCDB"/>
-          </a:solidFill>
-          <a:ln>
-            <a:noFill/>
-          </a:ln>
-        </p:spPr>
-        <p:txBody>
-          <a:bodyPr rtlCol="0" anchor="ctr"/>
-          <a:lstStyle/>
-          <a:p>
-            <a:pPr algn="ctr"/>
-          </a:p>
-        </p:txBody>
-      </p:sp>
-      <p:sp>
-        <p:nvSpPr>
-          <p:cNvPr id="5" name="Oval 4"/>
-          <p:cNvSpPr/>
-          <p:nvPr/>
-        </p:nvSpPr>
-        <p:spPr>
-          <a:xfrm>
-            <a:off x="2646000" y="536400"/>
-            <a:ext cx="36000" cy="36000"/>
-          </a:xfrm>
-          <a:prstGeom prst="ellipse">
-            <a:avLst/>
-          </a:prstGeom>
-          <a:solidFill>
-            <a:srgbClr val="FFE600"/>
-          </a:solidFill>
-          <a:ln>
-            <a:noFill/>
-          </a:ln>
-        </p:spPr>
-        <p:txBody>
-          <a:bodyPr rtlCol="0" anchor="ctr"/>
-          <a:lstStyle/>
-          <a:p>
-            <a:pPr algn="ctr"/>
-          </a:p>
-        </p:txBody>
-      </p:sp>
-      <p:sp>
-        <p:nvSpPr>
-          <p:cNvPr id="6" name="Oval 5"/>
-          <p:cNvSpPr/>
-          <p:nvPr/>
-        </p:nvSpPr>
-        <p:spPr>
-          <a:xfrm>
-            <a:off x="2746800" y="234000"/>
-            <a:ext cx="36000" cy="36000"/>
-          </a:xfrm>
-          <a:prstGeom prst="ellipse">
-            <a:avLst/>
-          </a:prstGeom>
-          <a:solidFill>
-            <a:srgbClr val="FFFCDB"/>
-          </a:solidFill>
-          <a:ln>
-            <a:noFill/>
-          </a:ln>
-        </p:spPr>
-        <p:txBody>
-          <a:bodyPr rtlCol="0" anchor="ctr"/>
-          <a:lstStyle/>
-          <a:p>
-            <a:pPr algn="ctr"/>
-          </a:p>
-        </p:txBody>
-      </p:sp>
-      <p:sp>
-        <p:nvSpPr>
-          <p:cNvPr id="7" name="Oval 6"/>
-          <p:cNvSpPr/>
-          <p:nvPr/>
-        </p:nvSpPr>
-        <p:spPr>
-          <a:xfrm>
-            <a:off x="2746800" y="334800"/>
-            <a:ext cx="36000" cy="36000"/>
-          </a:xfrm>
-          <a:prstGeom prst="ellipse">
-            <a:avLst/>
-          </a:prstGeom>
-          <a:solidFill>
-            <a:srgbClr val="FFFCDB"/>
-          </a:solidFill>
-          <a:ln>
-            <a:noFill/>
-          </a:ln>
-        </p:spPr>
-        <p:txBody>
-          <a:bodyPr rtlCol="0" anchor="ctr"/>
-          <a:lstStyle/>
-          <a:p>
-            <a:pPr algn="ctr"/>
-          </a:p>
-        </p:txBody>
-      </p:sp>
-      <p:sp>
-        <p:nvSpPr>
-          <p:cNvPr id="8" name="Oval 7"/>
-          <p:cNvSpPr/>
-          <p:nvPr/>
-        </p:nvSpPr>
-        <p:spPr>
-          <a:xfrm>
-            <a:off x="2746800" y="435600"/>
-            <a:ext cx="36000" cy="36000"/>
-          </a:xfrm>
-          <a:prstGeom prst="ellipse">
-            <a:avLst/>
-          </a:prstGeom>
-          <a:solidFill>
-            <a:srgbClr val="FFE600"/>
-          </a:solidFill>
-          <a:ln>
-            <a:noFill/>
-          </a:ln>
-        </p:spPr>
-        <p:txBody>
-          <a:bodyPr rtlCol="0" anchor="ctr"/>
-          <a:lstStyle/>
-          <a:p>
-            <a:pPr algn="ctr"/>
-          </a:p>
-        </p:txBody>
-      </p:sp>
-      <p:sp>
-        <p:nvSpPr>
-          <p:cNvPr id="9" name="Oval 8"/>
-          <p:cNvSpPr/>
-          <p:nvPr/>
-        </p:nvSpPr>
-        <p:spPr>
-          <a:xfrm>
-            <a:off x="2746800" y="536400"/>
-            <a:ext cx="36000" cy="36000"/>
-          </a:xfrm>
-          <a:prstGeom prst="ellipse">
-            <a:avLst/>
-          </a:prstGeom>
-          <a:solidFill>
-            <a:srgbClr val="FFFCDB"/>
-          </a:solidFill>
-          <a:ln>
-            <a:noFill/>
-          </a:ln>
-        </p:spPr>
-        <p:txBody>
-          <a:bodyPr rtlCol="0" anchor="ctr"/>
-          <a:lstStyle/>
-          <a:p>
-            <a:pPr algn="ctr"/>
-          </a:p>
-        </p:txBody>
-      </p:sp>
-      <p:sp>
-        <p:nvSpPr>
-          <p:cNvPr id="10" name="Oval 9"/>
-          <p:cNvSpPr/>
-          <p:nvPr/>
-        </p:nvSpPr>
-        <p:spPr>
-          <a:xfrm>
-            <a:off x="2847600" y="234000"/>
-            <a:ext cx="36000" cy="36000"/>
-          </a:xfrm>
-          <a:prstGeom prst="ellipse">
-            <a:avLst/>
-          </a:prstGeom>
-          <a:solidFill>
-            <a:srgbClr val="FFFCDB"/>
-          </a:solidFill>
-          <a:ln>
-            <a:noFill/>
-          </a:ln>
-        </p:spPr>
-        <p:txBody>
-          <a:bodyPr rtlCol="0" anchor="ctr"/>
-          <a:lstStyle/>
-          <a:p>
-            <a:pPr algn="ctr"/>
-          </a:p>
-        </p:txBody>
-      </p:sp>
-      <p:sp>
-        <p:nvSpPr>
-          <p:cNvPr id="11" name="Oval 10"/>
-          <p:cNvSpPr/>
-          <p:nvPr/>
-        </p:nvSpPr>
-        <p:spPr>
-          <a:xfrm>
-            <a:off x="2847600" y="334800"/>
-            <a:ext cx="36000" cy="36000"/>
-          </a:xfrm>
-          <a:prstGeom prst="ellipse">
-            <a:avLst/>
-          </a:prstGeom>
-          <a:solidFill>
-            <a:srgbClr val="FFE600"/>
-          </a:solidFill>
-          <a:ln>
-            <a:noFill/>
-          </a:ln>
-        </p:spPr>
-        <p:txBody>
-          <a:bodyPr rtlCol="0" anchor="ctr"/>
-          <a:lstStyle/>
-          <a:p>
-            <a:pPr algn="ctr"/>
-          </a:p>
-        </p:txBody>
-      </p:sp>
-      <p:sp>
-        <p:nvSpPr>
-          <p:cNvPr id="12" name="Oval 11"/>
-          <p:cNvSpPr/>
-          <p:nvPr/>
-        </p:nvSpPr>
-        <p:spPr>
-          <a:xfrm>
-            <a:off x="2847600" y="435600"/>
-            <a:ext cx="36000" cy="36000"/>
-          </a:xfrm>
-          <a:prstGeom prst="ellipse">
-            <a:avLst/>
-          </a:prstGeom>
-          <a:solidFill>
-            <a:srgbClr val="FFFCDB"/>
-          </a:solidFill>
-          <a:ln>
-            <a:noFill/>
-          </a:ln>
-        </p:spPr>
-        <p:txBody>
-          <a:bodyPr rtlCol="0" anchor="ctr"/>
-          <a:lstStyle/>
-          <a:p>
-            <a:pPr algn="ctr"/>
-          </a:p>
-        </p:txBody>
-      </p:sp>
-      <p:sp>
-        <p:nvSpPr>
-          <p:cNvPr id="13" name="Oval 12"/>
-          <p:cNvSpPr/>
-          <p:nvPr/>
-        </p:nvSpPr>
-        <p:spPr>
-          <a:xfrm>
-            <a:off x="2847600" y="536400"/>
-            <a:ext cx="36000" cy="36000"/>
-          </a:xfrm>
-          <a:prstGeom prst="ellipse">
-            <a:avLst/>
-          </a:prstGeom>
-          <a:solidFill>
-            <a:srgbClr val="FFFCDB"/>
-          </a:solidFill>
-          <a:ln>
-            <a:noFill/>
-          </a:ln>
-        </p:spPr>
-        <p:txBody>
-          <a:bodyPr rtlCol="0" anchor="ctr"/>
-          <a:lstStyle/>
-          <a:p>
-            <a:pPr algn="ctr"/>
-          </a:p>
-        </p:txBody>
-      </p:sp>
-      <p:sp>
-        <p:nvSpPr>
-          <p:cNvPr id="14" name="Oval 13"/>
-          <p:cNvSpPr/>
-          <p:nvPr/>
-        </p:nvSpPr>
-        <p:spPr>
-          <a:xfrm>
-            <a:off x="2948400" y="234000"/>
-            <a:ext cx="36000" cy="36000"/>
-          </a:xfrm>
-          <a:prstGeom prst="ellipse">
-            <a:avLst/>
-          </a:prstGeom>
-          <a:solidFill>
-            <a:srgbClr val="FFE600"/>
-          </a:solidFill>
-          <a:ln>
-            <a:noFill/>
-          </a:ln>
-        </p:spPr>
-        <p:txBody>
-          <a:bodyPr rtlCol="0" anchor="ctr"/>
-          <a:lstStyle/>
-          <a:p>
-            <a:pPr algn="ctr"/>
-          </a:p>
-        </p:txBody>
-      </p:sp>
-      <p:sp>
-        <p:nvSpPr>
-          <p:cNvPr id="15" name="Oval 14"/>
-          <p:cNvSpPr/>
-          <p:nvPr/>
-        </p:nvSpPr>
-        <p:spPr>
-          <a:xfrm>
-            <a:off x="2948400" y="334800"/>
-            <a:ext cx="36000" cy="36000"/>
-          </a:xfrm>
-          <a:prstGeom prst="ellipse">
-            <a:avLst/>
-          </a:prstGeom>
-          <a:solidFill>
-            <a:srgbClr val="FFFCDB"/>
-          </a:solidFill>
-          <a:ln>
-            <a:noFill/>
-          </a:ln>
-        </p:spPr>
-        <p:txBody>
-          <a:bodyPr rtlCol="0" anchor="ctr"/>
-          <a:lstStyle/>
-          <a:p>
-            <a:pPr algn="ctr"/>
-          </a:p>
-        </p:txBody>
-      </p:sp>
-      <p:sp>
-        <p:nvSpPr>
-          <p:cNvPr id="16" name="Oval 15"/>
-          <p:cNvSpPr/>
-          <p:nvPr/>
-        </p:nvSpPr>
-        <p:spPr>
-          <a:xfrm>
-            <a:off x="2948400" y="435600"/>
-            <a:ext cx="36000" cy="36000"/>
-          </a:xfrm>
-          <a:prstGeom prst="ellipse">
-            <a:avLst/>
-          </a:prstGeom>
-          <a:solidFill>
-            <a:srgbClr val="FFFCDB"/>
-          </a:solidFill>
-          <a:ln>
-            <a:noFill/>
-          </a:ln>
-        </p:spPr>
-        <p:txBody>
-          <a:bodyPr rtlCol="0" anchor="ctr"/>
-          <a:lstStyle/>
-          <a:p>
-            <a:pPr algn="ctr"/>
-          </a:p>
-        </p:txBody>
-      </p:sp>
-      <p:sp>
-        <p:nvSpPr>
-          <p:cNvPr id="17" name="Oval 16"/>
-          <p:cNvSpPr/>
-          <p:nvPr/>
-        </p:nvSpPr>
-        <p:spPr>
-          <a:xfrm>
-            <a:off x="2948400" y="536400"/>
-            <a:ext cx="36000" cy="36000"/>
-          </a:xfrm>
-          <a:prstGeom prst="ellipse">
-            <a:avLst/>
-          </a:prstGeom>
-          <a:solidFill>
-            <a:srgbClr val="FFE600"/>
-          </a:solidFill>
-          <a:ln>
-            <a:noFill/>
-          </a:ln>
-        </p:spPr>
-        <p:txBody>
-          <a:bodyPr rtlCol="0" anchor="ctr"/>
-          <a:lstStyle/>
-          <a:p>
-            <a:pPr algn="ctr"/>
-          </a:p>
-        </p:txBody>
-      </p:sp>
-      <p:sp>
-        <p:nvSpPr>
-          <p:cNvPr id="18" name="Oval 17"/>
-          <p:cNvSpPr/>
-          <p:nvPr/>
-        </p:nvSpPr>
-        <p:spPr>
-          <a:xfrm>
-            <a:off x="3049200" y="234000"/>
-            <a:ext cx="36000" cy="36000"/>
-          </a:xfrm>
-          <a:prstGeom prst="ellipse">
-            <a:avLst/>
-          </a:prstGeom>
-          <a:solidFill>
-            <a:srgbClr val="FFFCDB"/>
-          </a:solidFill>
-          <a:ln>
-            <a:noFill/>
-          </a:ln>
-        </p:spPr>
-        <p:txBody>
-          <a:bodyPr rtlCol="0" anchor="ctr"/>
-          <a:lstStyle/>
-          <a:p>
-            <a:pPr algn="ctr"/>
-          </a:p>
-        </p:txBody>
-      </p:sp>
-      <p:sp>
-        <p:nvSpPr>
-          <p:cNvPr id="19" name="Oval 18"/>
-          <p:cNvSpPr/>
-          <p:nvPr/>
-        </p:nvSpPr>
-        <p:spPr>
-          <a:xfrm>
-            <a:off x="3049200" y="334800"/>
-            <a:ext cx="36000" cy="36000"/>
-          </a:xfrm>
-          <a:prstGeom prst="ellipse">
-            <a:avLst/>
-          </a:prstGeom>
-          <a:solidFill>
-            <a:srgbClr val="FFFCDB"/>
-          </a:solidFill>
-          <a:ln>
-            <a:noFill/>
-          </a:ln>
-        </p:spPr>
-        <p:txBody>
-          <a:bodyPr rtlCol="0" anchor="ctr"/>
-          <a:lstStyle/>
-          <a:p>
-            <a:pPr algn="ctr"/>
-          </a:p>
-        </p:txBody>
-      </p:sp>
-      <p:sp>
-        <p:nvSpPr>
-          <p:cNvPr id="20" name="Oval 19"/>
-          <p:cNvSpPr/>
-          <p:nvPr/>
-        </p:nvSpPr>
-        <p:spPr>
-          <a:xfrm>
-            <a:off x="3049200" y="435600"/>
-            <a:ext cx="36000" cy="36000"/>
-          </a:xfrm>
-          <a:prstGeom prst="ellipse">
-            <a:avLst/>
-          </a:prstGeom>
-          <a:solidFill>
-            <a:srgbClr val="FFE600"/>
-          </a:solidFill>
-          <a:ln>
-            <a:noFill/>
-          </a:ln>
-        </p:spPr>
-        <p:txBody>
-          <a:bodyPr rtlCol="0" anchor="ctr"/>
-          <a:lstStyle/>
-          <a:p>
-            <a:pPr algn="ctr"/>
-          </a:p>
-        </p:txBody>
-      </p:sp>
-      <p:sp>
-        <p:nvSpPr>
-          <p:cNvPr id="21" name="Oval 20"/>
-          <p:cNvSpPr/>
-          <p:nvPr/>
-        </p:nvSpPr>
-        <p:spPr>
-          <a:xfrm>
-            <a:off x="3049200" y="536400"/>
-            <a:ext cx="36000" cy="36000"/>
-          </a:xfrm>
-          <a:prstGeom prst="ellipse">
-            <a:avLst/>
-          </a:prstGeom>
-          <a:solidFill>
-            <a:srgbClr val="FFFCDB"/>
-          </a:solidFill>
-          <a:ln>
-            <a:noFill/>
-          </a:ln>
-        </p:spPr>
-        <p:txBody>
-          <a:bodyPr rtlCol="0" anchor="ctr"/>
-          <a:lstStyle/>
-          <a:p>
-            <a:pPr algn="ctr"/>
-          </a:p>
-        </p:txBody>
-      </p:sp>
-      <p:sp>
-        <p:nvSpPr>
-          <p:cNvPr id="22" name="텍스트"/>
+          <p:cNvPr id="4" name="텍스트"/>
           <p:cNvSpPr txBox="1"/>
           <p:nvPr/>
         </p:nvSpPr>
         <p:spPr>
           <a:xfrm>
-            <a:off x="252000" y="223200"/>
-            <a:ext cx="1440000" cy="133351"/>
+            <a:off x="252000" y="252000"/>
+            <a:ext cx="1512000" cy="123826"/>
           </a:xfrm>
           <a:prstGeom prst="rect">
             <a:avLst/>
@@ -3701,11 +3179,11 @@
           <a:p>
             <a:pPr algn="l">
               <a:lnSpc>
-                <a:spcPts val="1015"/>
+                <a:spcPts val="942"/>
               </a:lnSpc>
             </a:pPr>
             <a:r>
-              <a:rPr sz="700" b="1" spc="200">
+              <a:rPr sz="650" b="1" spc="220">
                 <a:solidFill>
                   <a:srgbClr val="6B7280"/>
                 </a:solidFill>
@@ -3719,14 +3197,14 @@
       </p:sp>
       <p:sp>
         <p:nvSpPr>
-          <p:cNvPr id="23" name="텍스트"/>
+          <p:cNvPr id="5" name="텍스트"/>
           <p:cNvSpPr txBox="1"/>
           <p:nvPr/>
         </p:nvSpPr>
         <p:spPr>
           <a:xfrm>
-            <a:off x="252000" y="770400"/>
-            <a:ext cx="2016000" cy="360000"/>
+            <a:off x="252000" y="576000"/>
+            <a:ext cx="1800000" cy="237600"/>
           </a:xfrm>
           <a:prstGeom prst="rect">
             <a:avLst/>
@@ -3741,11 +3219,11 @@
           <a:p>
             <a:pPr algn="l">
               <a:lnSpc>
-                <a:spcPts val="3190"/>
+                <a:spcPts val="1957"/>
               </a:lnSpc>
             </a:pPr>
             <a:r>
-              <a:rPr sz="2200" b="1">
+              <a:rPr sz="1350" b="1" spc="120">
                 <a:solidFill>
                   <a:srgbClr val="12151C"/>
                 </a:solidFill>
@@ -3759,14 +3237,14 @@
       </p:sp>
       <p:sp>
         <p:nvSpPr>
-          <p:cNvPr id="24" name="텍스트"/>
+          <p:cNvPr id="6" name="텍스트"/>
           <p:cNvSpPr txBox="1"/>
           <p:nvPr/>
         </p:nvSpPr>
         <p:spPr>
           <a:xfrm>
-            <a:off x="252000" y="1173600"/>
-            <a:ext cx="2016000" cy="171451"/>
+            <a:off x="252000" y="828000"/>
+            <a:ext cx="1800000" cy="133351"/>
           </a:xfrm>
           <a:prstGeom prst="rect">
             <a:avLst/>
@@ -3781,11 +3259,11 @@
           <a:p>
             <a:pPr algn="l">
               <a:lnSpc>
-                <a:spcPts val="1305"/>
+                <a:spcPts val="1015"/>
               </a:lnSpc>
             </a:pPr>
             <a:r>
-              <a:rPr sz="900" b="0">
+              <a:rPr sz="700" b="0" spc="60">
                 <a:solidFill>
                   <a:srgbClr val="6B7280"/>
                 </a:solidFill>
@@ -3799,14 +3277,14 @@
       </p:sp>
       <p:sp>
         <p:nvSpPr>
-          <p:cNvPr id="25" name="텍스트"/>
+          <p:cNvPr id="7" name="텍스트"/>
           <p:cNvSpPr txBox="1"/>
           <p:nvPr/>
         </p:nvSpPr>
         <p:spPr>
           <a:xfrm>
-            <a:off x="1620000" y="1339200"/>
-            <a:ext cx="1368000" cy="133351"/>
+            <a:off x="252000" y="1411200"/>
+            <a:ext cx="900000" cy="91441"/>
           </a:xfrm>
           <a:prstGeom prst="rect">
             <a:avLst/>
@@ -3819,13 +3297,53 @@
           </a:bodyPr>
           <a:lstStyle/>
           <a:p>
-            <a:pPr algn="r">
+            <a:pPr algn="l">
               <a:lnSpc>
-                <a:spcPts val="1015"/>
+                <a:spcPts val="696"/>
               </a:lnSpc>
             </a:pPr>
             <a:r>
-              <a:rPr sz="700" b="0">
+              <a:rPr sz="480" b="1" spc="140">
+                <a:solidFill>
+                  <a:srgbClr val="6B7280"/>
+                </a:solidFill>
+                <a:latin typeface="맑은 고딕"/>
+                <a:ea typeface="맑은 고딕"/>
+              </a:rPr>
+              <a:t>TEL</a:t>
+            </a:r>
+          </a:p>
+        </p:txBody>
+      </p:sp>
+      <p:sp>
+        <p:nvSpPr>
+          <p:cNvPr id="8" name="텍스트"/>
+          <p:cNvSpPr txBox="1"/>
+          <p:nvPr/>
+        </p:nvSpPr>
+        <p:spPr>
+          <a:xfrm>
+            <a:off x="252000" y="1512000"/>
+            <a:ext cx="900000" cy="120016"/>
+          </a:xfrm>
+          <a:prstGeom prst="rect">
+            <a:avLst/>
+          </a:prstGeom>
+          <a:noFill/>
+        </p:spPr>
+        <p:txBody>
+          <a:bodyPr wrap="square" lIns="0" rIns="0" tIns="0" bIns="0" anchor="t">
+            <a:spAutoFit/>
+          </a:bodyPr>
+          <a:lstStyle/>
+          <a:p>
+            <a:pPr algn="l">
+              <a:lnSpc>
+                <a:spcPts val="913"/>
+              </a:lnSpc>
+            </a:pPr>
+            <a:r>
+              <a:rPr sz="630" b="0">
                 <a:solidFill>
                   <a:srgbClr val="12151C"/>
                 </a:solidFill>
@@ -3837,16 +3355,37 @@
           </a:p>
         </p:txBody>
       </p:sp>
-      <p:sp>
-        <p:nvSpPr>
-          <p:cNvPr id="26" name="텍스트"/>
+      <p:cxnSp>
+        <p:nvCxnSpPr>
+          <p:cNvPr id="9" name="Connector 8"/>
+          <p:cNvCxnSpPr/>
+          <p:nvPr/>
+        </p:nvCxnSpPr>
+        <p:spPr>
+          <a:xfrm>
+            <a:off x="1072800" y="1411200"/>
+            <a:ext cx="0" cy="201600"/>
+          </a:xfrm>
+          <a:prstGeom prst="line">
+            <a:avLst/>
+          </a:prstGeom>
+          <a:ln w="3600">
+            <a:solidFill>
+              <a:srgbClr val="E3E5E9"/>
+            </a:solidFill>
+          </a:ln>
+        </p:spPr>
+      </p:cxnSp>
+      <p:sp>
+        <p:nvSpPr>
+          <p:cNvPr id="10" name="텍스트"/>
           <p:cNvSpPr txBox="1"/>
           <p:nvPr/>
         </p:nvSpPr>
         <p:spPr>
           <a:xfrm>
-            <a:off x="1620000" y="1476000"/>
-            <a:ext cx="1368000" cy="133351"/>
+            <a:off x="1152000" y="1411200"/>
+            <a:ext cx="1008000" cy="91441"/>
           </a:xfrm>
           <a:prstGeom prst="rect">
             <a:avLst/>
@@ -3859,13 +3398,53 @@
           </a:bodyPr>
           <a:lstStyle/>
           <a:p>
-            <a:pPr algn="r">
+            <a:pPr algn="l">
               <a:lnSpc>
-                <a:spcPts val="1015"/>
+                <a:spcPts val="696"/>
               </a:lnSpc>
             </a:pPr>
             <a:r>
-              <a:rPr sz="700" b="0">
+              <a:rPr sz="480" b="1" spc="140">
+                <a:solidFill>
+                  <a:srgbClr val="6B7280"/>
+                </a:solidFill>
+                <a:latin typeface="맑은 고딕"/>
+                <a:ea typeface="맑은 고딕"/>
+              </a:rPr>
+              <a:t>MAIL</a:t>
+            </a:r>
+          </a:p>
+        </p:txBody>
+      </p:sp>
+      <p:sp>
+        <p:nvSpPr>
+          <p:cNvPr id="11" name="텍스트"/>
+          <p:cNvSpPr txBox="1"/>
+          <p:nvPr/>
+        </p:nvSpPr>
+        <p:spPr>
+          <a:xfrm>
+            <a:off x="1152000" y="1512000"/>
+            <a:ext cx="1008000" cy="120016"/>
+          </a:xfrm>
+          <a:prstGeom prst="rect">
+            <a:avLst/>
+          </a:prstGeom>
+          <a:noFill/>
+        </p:spPr>
+        <p:txBody>
+          <a:bodyPr wrap="square" lIns="0" rIns="0" tIns="0" bIns="0" anchor="t">
+            <a:spAutoFit/>
+          </a:bodyPr>
+          <a:lstStyle/>
+          <a:p>
+            <a:pPr algn="l">
+              <a:lnSpc>
+                <a:spcPts val="913"/>
+              </a:lnSpc>
+            </a:pPr>
+            <a:r>
+              <a:rPr sz="630" b="0">
                 <a:solidFill>
                   <a:srgbClr val="12151C"/>
                 </a:solidFill>
@@ -3877,16 +3456,37 @@
           </a:p>
         </p:txBody>
       </p:sp>
-      <p:sp>
-        <p:nvSpPr>
-          <p:cNvPr id="27" name="텍스트"/>
+      <p:cxnSp>
+        <p:nvCxnSpPr>
+          <p:cNvPr id="12" name="Connector 11"/>
+          <p:cNvCxnSpPr/>
+          <p:nvPr/>
+        </p:nvCxnSpPr>
+        <p:spPr>
+          <a:xfrm>
+            <a:off x="2080800" y="1411200"/>
+            <a:ext cx="0" cy="201600"/>
+          </a:xfrm>
+          <a:prstGeom prst="line">
+            <a:avLst/>
+          </a:prstGeom>
+          <a:ln w="3600">
+            <a:solidFill>
+              <a:srgbClr val="E3E5E9"/>
+            </a:solidFill>
+          </a:ln>
+        </p:spPr>
+      </p:cxnSp>
+      <p:sp>
+        <p:nvSpPr>
+          <p:cNvPr id="13" name="텍스트"/>
           <p:cNvSpPr txBox="1"/>
           <p:nvPr/>
         </p:nvSpPr>
         <p:spPr>
           <a:xfrm>
-            <a:off x="1620000" y="1612800"/>
-            <a:ext cx="1368000" cy="133351"/>
+            <a:off x="2160000" y="1411200"/>
+            <a:ext cx="972000" cy="91441"/>
           </a:xfrm>
           <a:prstGeom prst="rect">
             <a:avLst/>
@@ -3899,13 +3499,53 @@
           </a:bodyPr>
           <a:lstStyle/>
           <a:p>
-            <a:pPr algn="r">
+            <a:pPr algn="l">
               <a:lnSpc>
-                <a:spcPts val="1015"/>
+                <a:spcPts val="696"/>
               </a:lnSpc>
             </a:pPr>
             <a:r>
-              <a:rPr sz="700" b="0">
+              <a:rPr sz="480" b="1" spc="140">
+                <a:solidFill>
+                  <a:srgbClr val="6B7280"/>
+                </a:solidFill>
+                <a:latin typeface="맑은 고딕"/>
+                <a:ea typeface="맑은 고딕"/>
+              </a:rPr>
+              <a:t>ADDR</a:t>
+            </a:r>
+          </a:p>
+        </p:txBody>
+      </p:sp>
+      <p:sp>
+        <p:nvSpPr>
+          <p:cNvPr id="14" name="텍스트"/>
+          <p:cNvSpPr txBox="1"/>
+          <p:nvPr/>
+        </p:nvSpPr>
+        <p:spPr>
+          <a:xfrm>
+            <a:off x="2160000" y="1512000"/>
+            <a:ext cx="972000" cy="120016"/>
+          </a:xfrm>
+          <a:prstGeom prst="rect">
+            <a:avLst/>
+          </a:prstGeom>
+          <a:noFill/>
+        </p:spPr>
+        <p:txBody>
+          <a:bodyPr wrap="square" lIns="0" rIns="0" tIns="0" bIns="0" anchor="t">
+            <a:spAutoFit/>
+          </a:bodyPr>
+          <a:lstStyle/>
+          <a:p>
+            <a:pPr algn="l">
+              <a:lnSpc>
+                <a:spcPts val="913"/>
+              </a:lnSpc>
+            </a:pPr>
+            <a:r>
+              <a:rPr sz="630" b="0">
                 <a:solidFill>
                   <a:srgbClr val="12151C"/>
                 </a:solidFill>
@@ -3943,18 +3583,226 @@
         <p:nvPr/>
       </p:nvGrpSpPr>
       <p:grpSpPr/>
-      <p:sp>
-        <p:nvSpPr>
-          <p:cNvPr id="2" name="Oval 1"/>
+      <p:cxnSp>
+        <p:nvCxnSpPr>
+          <p:cNvPr id="2" name="Connector 1"/>
+          <p:cNvCxnSpPr/>
+          <p:nvPr/>
+        </p:nvCxnSpPr>
+        <p:spPr>
+          <a:xfrm>
+            <a:off x="93600" y="122400"/>
+            <a:ext cx="57600" cy="0"/>
+          </a:xfrm>
+          <a:prstGeom prst="line">
+            <a:avLst/>
+          </a:prstGeom>
+          <a:ln w="3600">
+            <a:solidFill>
+              <a:srgbClr val="DCDFE4"/>
+            </a:solidFill>
+          </a:ln>
+        </p:spPr>
+      </p:cxnSp>
+      <p:cxnSp>
+        <p:nvCxnSpPr>
+          <p:cNvPr id="3" name="Connector 2"/>
+          <p:cNvCxnSpPr/>
+          <p:nvPr/>
+        </p:nvCxnSpPr>
+        <p:spPr>
+          <a:xfrm>
+            <a:off x="122400" y="93600"/>
+            <a:ext cx="0" cy="57600"/>
+          </a:xfrm>
+          <a:prstGeom prst="line">
+            <a:avLst/>
+          </a:prstGeom>
+          <a:ln w="3600">
+            <a:solidFill>
+              <a:srgbClr val="DCDFE4"/>
+            </a:solidFill>
+          </a:ln>
+        </p:spPr>
+      </p:cxnSp>
+      <p:cxnSp>
+        <p:nvCxnSpPr>
+          <p:cNvPr id="4" name="Connector 3"/>
+          <p:cNvCxnSpPr/>
+          <p:nvPr/>
+        </p:nvCxnSpPr>
+        <p:spPr>
+          <a:xfrm>
+            <a:off x="3088800" y="122400"/>
+            <a:ext cx="57600" cy="0"/>
+          </a:xfrm>
+          <a:prstGeom prst="line">
+            <a:avLst/>
+          </a:prstGeom>
+          <a:ln w="3600">
+            <a:solidFill>
+              <a:srgbClr val="DCDFE4"/>
+            </a:solidFill>
+          </a:ln>
+        </p:spPr>
+      </p:cxnSp>
+      <p:cxnSp>
+        <p:nvCxnSpPr>
+          <p:cNvPr id="5" name="Connector 4"/>
+          <p:cNvCxnSpPr/>
+          <p:nvPr/>
+        </p:nvCxnSpPr>
+        <p:spPr>
+          <a:xfrm>
+            <a:off x="3117600" y="93600"/>
+            <a:ext cx="0" cy="57600"/>
+          </a:xfrm>
+          <a:prstGeom prst="line">
+            <a:avLst/>
+          </a:prstGeom>
+          <a:ln w="3600">
+            <a:solidFill>
+              <a:srgbClr val="DCDFE4"/>
+            </a:solidFill>
+          </a:ln>
+        </p:spPr>
+      </p:cxnSp>
+      <p:cxnSp>
+        <p:nvCxnSpPr>
+          <p:cNvPr id="6" name="Connector 5"/>
+          <p:cNvCxnSpPr/>
+          <p:nvPr/>
+        </p:nvCxnSpPr>
+        <p:spPr>
+          <a:xfrm>
+            <a:off x="93600" y="1677600"/>
+            <a:ext cx="57600" cy="0"/>
+          </a:xfrm>
+          <a:prstGeom prst="line">
+            <a:avLst/>
+          </a:prstGeom>
+          <a:ln w="3600">
+            <a:solidFill>
+              <a:srgbClr val="DCDFE4"/>
+            </a:solidFill>
+          </a:ln>
+        </p:spPr>
+      </p:cxnSp>
+      <p:cxnSp>
+        <p:nvCxnSpPr>
+          <p:cNvPr id="7" name="Connector 6"/>
+          <p:cNvCxnSpPr/>
+          <p:nvPr/>
+        </p:nvCxnSpPr>
+        <p:spPr>
+          <a:xfrm>
+            <a:off x="122400" y="1648800"/>
+            <a:ext cx="0" cy="57600"/>
+          </a:xfrm>
+          <a:prstGeom prst="line">
+            <a:avLst/>
+          </a:prstGeom>
+          <a:ln w="3600">
+            <a:solidFill>
+              <a:srgbClr val="DCDFE4"/>
+            </a:solidFill>
+          </a:ln>
+        </p:spPr>
+      </p:cxnSp>
+      <p:cxnSp>
+        <p:nvCxnSpPr>
+          <p:cNvPr id="8" name="Connector 7"/>
+          <p:cNvCxnSpPr/>
+          <p:nvPr/>
+        </p:nvCxnSpPr>
+        <p:spPr>
+          <a:xfrm>
+            <a:off x="3088800" y="1677600"/>
+            <a:ext cx="57600" cy="0"/>
+          </a:xfrm>
+          <a:prstGeom prst="line">
+            <a:avLst/>
+          </a:prstGeom>
+          <a:ln w="3600">
+            <a:solidFill>
+              <a:srgbClr val="DCDFE4"/>
+            </a:solidFill>
+          </a:ln>
+        </p:spPr>
+      </p:cxnSp>
+      <p:cxnSp>
+        <p:nvCxnSpPr>
+          <p:cNvPr id="9" name="Connector 8"/>
+          <p:cNvCxnSpPr/>
+          <p:nvPr/>
+        </p:nvCxnSpPr>
+        <p:spPr>
+          <a:xfrm>
+            <a:off x="3117600" y="1648800"/>
+            <a:ext cx="0" cy="57600"/>
+          </a:xfrm>
+          <a:prstGeom prst="line">
+            <a:avLst/>
+          </a:prstGeom>
+          <a:ln w="3600">
+            <a:solidFill>
+              <a:srgbClr val="DCDFE4"/>
+            </a:solidFill>
+          </a:ln>
+        </p:spPr>
+      </p:cxnSp>
+      <p:sp>
+        <p:nvSpPr>
+          <p:cNvPr id="10" name="텍스트"/>
+          <p:cNvSpPr txBox="1"/>
+          <p:nvPr/>
+        </p:nvSpPr>
+        <p:spPr>
+          <a:xfrm>
+            <a:off x="360000" y="331200"/>
+            <a:ext cx="2520000" cy="99061"/>
+          </a:xfrm>
+          <a:prstGeom prst="rect">
+            <a:avLst/>
+          </a:prstGeom>
+          <a:noFill/>
+        </p:spPr>
+        <p:txBody>
+          <a:bodyPr wrap="square" lIns="0" rIns="0" tIns="0" bIns="0" anchor="t">
+            <a:spAutoFit/>
+          </a:bodyPr>
+          <a:lstStyle/>
+          <a:p>
+            <a:pPr algn="ctr">
+              <a:lnSpc>
+                <a:spcPts val="754"/>
+              </a:lnSpc>
+            </a:pPr>
+            <a:r>
+              <a:rPr sz="520" b="1" spc="240">
+                <a:solidFill>
+                  <a:srgbClr val="6B7280"/>
+                </a:solidFill>
+                <a:latin typeface="맑은 고딕"/>
+                <a:ea typeface="맑은 고딕"/>
+              </a:rPr>
+              <a:t>담당 업무</a:t>
+            </a:r>
+          </a:p>
+        </p:txBody>
+      </p:sp>
+      <p:sp>
+        <p:nvSpPr>
+          <p:cNvPr id="11" name="Rectangle 10"/>
           <p:cNvSpPr/>
           <p:nvPr/>
         </p:nvSpPr>
         <p:spPr>
           <a:xfrm>
-            <a:off x="1591200" y="511200"/>
-            <a:ext cx="57600" cy="57600"/>
-          </a:xfrm>
-          <a:prstGeom prst="ellipse">
+            <a:off x="1530000" y="453600"/>
+            <a:ext cx="180000" cy="14400"/>
+          </a:xfrm>
+          <a:prstGeom prst="rect">
             <a:avLst/>
           </a:prstGeom>
           <a:solidFill>
@@ -3974,14 +3822,14 @@
       </p:sp>
       <p:sp>
         <p:nvSpPr>
-          <p:cNvPr id="3" name="텍스트"/>
+          <p:cNvPr id="12" name="텍스트"/>
           <p:cNvSpPr txBox="1"/>
           <p:nvPr/>
         </p:nvSpPr>
         <p:spPr>
           <a:xfrm>
-            <a:off x="396000" y="684000"/>
-            <a:ext cx="2448000" cy="504000"/>
+            <a:off x="360000" y="684000"/>
+            <a:ext cx="840000" cy="216000"/>
           </a:xfrm>
           <a:prstGeom prst="rect">
             <a:avLst/>
@@ -3989,38 +3837,261 @@
           <a:noFill/>
         </p:spPr>
         <p:txBody>
-          <a:bodyPr wrap="square" lIns="0" rIns="0" tIns="0" bIns="0" anchor="t">
+          <a:bodyPr wrap="square" lIns="0" rIns="0" tIns="0" bIns="0" anchor="ctr">
             <a:spAutoFit/>
           </a:bodyPr>
           <a:lstStyle/>
           <a:p>
             <a:pPr algn="ctr">
               <a:lnSpc>
-                <a:spcPts val="1739"/>
+                <a:spcPts val="1015"/>
               </a:lnSpc>
             </a:pPr>
             <a:r>
-              <a:rPr sz="1200" b="1">
+              <a:rPr sz="700" b="1">
                 <a:solidFill>
                   <a:srgbClr val="12151C"/>
                 </a:solidFill>
                 <a:latin typeface="맑은 고딕"/>
                 <a:ea typeface="맑은 고딕"/>
               </a:rPr>
-              <a:t>숫자 뒤의 사람을 먼저 봅니다</a:t>
-            </a:r>
-          </a:p>
-        </p:txBody>
-      </p:sp>
-      <p:sp>
-        <p:nvSpPr>
-          <p:cNvPr id="4" name="텍스트"/>
+              <a:t>재무 · 회계</a:t>
+            </a:r>
+          </a:p>
+        </p:txBody>
+      </p:sp>
+      <p:sp>
+        <p:nvSpPr>
+          <p:cNvPr id="13" name="텍스트"/>
           <p:cNvSpPr txBox="1"/>
           <p:nvPr/>
         </p:nvSpPr>
         <p:spPr>
           <a:xfrm>
-            <a:off x="360000" y="1339200"/>
+            <a:off x="1200000" y="684000"/>
+            <a:ext cx="840000" cy="216000"/>
+          </a:xfrm>
+          <a:prstGeom prst="rect">
+            <a:avLst/>
+          </a:prstGeom>
+          <a:noFill/>
+        </p:spPr>
+        <p:txBody>
+          <a:bodyPr wrap="square" lIns="0" rIns="0" tIns="0" bIns="0" anchor="ctr">
+            <a:spAutoFit/>
+          </a:bodyPr>
+          <a:lstStyle/>
+          <a:p>
+            <a:pPr algn="ctr">
+              <a:lnSpc>
+                <a:spcPts val="1015"/>
+              </a:lnSpc>
+            </a:pPr>
+            <a:r>
+              <a:rPr sz="700" b="1">
+                <a:solidFill>
+                  <a:srgbClr val="12151C"/>
+                </a:solidFill>
+                <a:latin typeface="맑은 고딕"/>
+                <a:ea typeface="맑은 고딕"/>
+              </a:rPr>
+              <a:t>인사 · 총무</a:t>
+            </a:r>
+          </a:p>
+        </p:txBody>
+      </p:sp>
+      <p:cxnSp>
+        <p:nvCxnSpPr>
+          <p:cNvPr id="14" name="Connector 13"/>
+          <p:cNvCxnSpPr/>
+          <p:nvPr/>
+        </p:nvCxnSpPr>
+        <p:spPr>
+          <a:xfrm>
+            <a:off x="1200000" y="676800"/>
+            <a:ext cx="0" cy="230400"/>
+          </a:xfrm>
+          <a:prstGeom prst="line">
+            <a:avLst/>
+          </a:prstGeom>
+          <a:ln w="3600">
+            <a:solidFill>
+              <a:srgbClr val="DCDFE4"/>
+            </a:solidFill>
+          </a:ln>
+        </p:spPr>
+      </p:cxnSp>
+      <p:sp>
+        <p:nvSpPr>
+          <p:cNvPr id="15" name="텍스트"/>
+          <p:cNvSpPr txBox="1"/>
+          <p:nvPr/>
+        </p:nvSpPr>
+        <p:spPr>
+          <a:xfrm>
+            <a:off x="2040000" y="684000"/>
+            <a:ext cx="840000" cy="216000"/>
+          </a:xfrm>
+          <a:prstGeom prst="rect">
+            <a:avLst/>
+          </a:prstGeom>
+          <a:noFill/>
+        </p:spPr>
+        <p:txBody>
+          <a:bodyPr wrap="square" lIns="0" rIns="0" tIns="0" bIns="0" anchor="ctr">
+            <a:spAutoFit/>
+          </a:bodyPr>
+          <a:lstStyle/>
+          <a:p>
+            <a:pPr algn="ctr">
+              <a:lnSpc>
+                <a:spcPts val="1015"/>
+              </a:lnSpc>
+            </a:pPr>
+            <a:r>
+              <a:rPr sz="700" b="1">
+                <a:solidFill>
+                  <a:srgbClr val="12151C"/>
+                </a:solidFill>
+                <a:latin typeface="맑은 고딕"/>
+                <a:ea typeface="맑은 고딕"/>
+              </a:rPr>
+              <a:t>고객 응대</a:t>
+            </a:r>
+          </a:p>
+        </p:txBody>
+      </p:sp>
+      <p:cxnSp>
+        <p:nvCxnSpPr>
+          <p:cNvPr id="16" name="Connector 15"/>
+          <p:cNvCxnSpPr/>
+          <p:nvPr/>
+        </p:nvCxnSpPr>
+        <p:spPr>
+          <a:xfrm>
+            <a:off x="2040000" y="676800"/>
+            <a:ext cx="0" cy="230400"/>
+          </a:xfrm>
+          <a:prstGeom prst="line">
+            <a:avLst/>
+          </a:prstGeom>
+          <a:ln w="3600">
+            <a:solidFill>
+              <a:srgbClr val="DCDFE4"/>
+            </a:solidFill>
+          </a:ln>
+        </p:spPr>
+      </p:cxnSp>
+      <p:cxnSp>
+        <p:nvCxnSpPr>
+          <p:cNvPr id="17" name="Connector 16"/>
+          <p:cNvCxnSpPr/>
+          <p:nvPr/>
+        </p:nvCxnSpPr>
+        <p:spPr>
+          <a:xfrm>
+            <a:off x="360000" y="1159200"/>
+            <a:ext cx="2520000" cy="0"/>
+          </a:xfrm>
+          <a:prstGeom prst="line">
+            <a:avLst/>
+          </a:prstGeom>
+          <a:ln w="3600">
+            <a:solidFill>
+              <a:srgbClr val="DCDFE4"/>
+            </a:solidFill>
+          </a:ln>
+        </p:spPr>
+      </p:cxnSp>
+      <p:sp>
+        <p:nvSpPr>
+          <p:cNvPr id="18" name="텍스트"/>
+          <p:cNvSpPr txBox="1"/>
+          <p:nvPr/>
+        </p:nvSpPr>
+        <p:spPr>
+          <a:xfrm>
+            <a:off x="360000" y="1245600"/>
+            <a:ext cx="1224000" cy="118111"/>
+          </a:xfrm>
+          <a:prstGeom prst="rect">
+            <a:avLst/>
+          </a:prstGeom>
+          <a:noFill/>
+        </p:spPr>
+        <p:txBody>
+          <a:bodyPr wrap="square" lIns="0" rIns="0" tIns="0" bIns="0" anchor="t">
+            <a:spAutoFit/>
+          </a:bodyPr>
+          <a:lstStyle/>
+          <a:p>
+            <a:pPr algn="ctr">
+              <a:lnSpc>
+                <a:spcPts val="899"/>
+              </a:lnSpc>
+            </a:pPr>
+            <a:r>
+              <a:rPr sz="620" b="0">
+                <a:solidFill>
+                  <a:srgbClr val="12151C"/>
+                </a:solidFill>
+                <a:latin typeface="맑은 고딕"/>
+                <a:ea typeface="맑은 고딕"/>
+              </a:rPr>
+              <a:t>평일 10:00 – 19:00</a:t>
+            </a:r>
+          </a:p>
+        </p:txBody>
+      </p:sp>
+      <p:sp>
+        <p:nvSpPr>
+          <p:cNvPr id="19" name="텍스트"/>
+          <p:cNvSpPr txBox="1"/>
+          <p:nvPr/>
+        </p:nvSpPr>
+        <p:spPr>
+          <a:xfrm>
+            <a:off x="1656000" y="1245600"/>
+            <a:ext cx="1224000" cy="118111"/>
+          </a:xfrm>
+          <a:prstGeom prst="rect">
+            <a:avLst/>
+          </a:prstGeom>
+          <a:noFill/>
+        </p:spPr>
+        <p:txBody>
+          <a:bodyPr wrap="square" lIns="0" rIns="0" tIns="0" bIns="0" anchor="t">
+            <a:spAutoFit/>
+          </a:bodyPr>
+          <a:lstStyle/>
+          <a:p>
+            <a:pPr algn="ctr">
+              <a:lnSpc>
+                <a:spcPts val="899"/>
+              </a:lnSpc>
+            </a:pPr>
+            <a:r>
+              <a:rPr sz="620" b="0">
+                <a:solidFill>
+                  <a:srgbClr val="12151C"/>
+                </a:solidFill>
+                <a:latin typeface="맑은 고딕"/>
+                <a:ea typeface="맑은 고딕"/>
+              </a:rPr>
+              <a:t>KAKAO  @채널아이디</a:t>
+            </a:r>
+          </a:p>
+        </p:txBody>
+      </p:sp>
+      <p:sp>
+        <p:nvSpPr>
+          <p:cNvPr id="20" name="텍스트"/>
+          <p:cNvSpPr txBox="1"/>
+          <p:nvPr/>
+        </p:nvSpPr>
+        <p:spPr>
+          <a:xfrm>
+            <a:off x="360000" y="1526400"/>
             <a:ext cx="2520000" cy="123826"/>
           </a:xfrm>
           <a:prstGeom prst="rect">
@@ -4040,7 +4111,7 @@
               </a:lnSpc>
             </a:pPr>
             <a:r>
-              <a:rPr sz="650" b="1" spc="300">
+              <a:rPr sz="650" b="1" spc="220">
                 <a:solidFill>
                   <a:srgbClr val="6B7280"/>
                 </a:solidFill>
